--- a/slides/modules/m15-multi-tenancy-workload-security.pptx
+++ b/slides/modules/m15-multi-tenancy-workload-security.pptx
@@ -14,6 +14,7 @@
     <p:sldId id="262" r:id="rId14"/>
     <p:sldId id="263" r:id="rId15"/>
     <p:sldId id="264" r:id="rId16"/>
+    <p:sldId id="265" r:id="rId17"/>
   </p:sldIdLst>
   <p:sldSz cx="12191695" cy="6858000" type="screen4x3"/>
   <p:notesSz cx="6858000" cy="9144000"/>
@@ -1001,6 +1002,76 @@
           <a:p>
             <a:r>
               <a:t>Land the transfer and stay honest. Discussion prompts: is your team access expressed as group bindings or a pile of per-person grants nobody prunes; could you produce a filtered "who can read prod Secrets" list for an auditor on demand; and when legacy images that assume root hit your cluster, is the default answer "fix the image" or a sprawl of anyuid grants you can never take back. Then the credibility close on restraint: don't write a custom Role when view/edit/admin fit; don't reach for cluster-per-team when namespace-per-team isolates you fine; don't grant an SCC exception where fixing the image is cheaper; and don't make quota a straitjacket. Governance over-applied is its own failure mode.</a:t>
+            </a:r>
+          </a:p>
+        </p:txBody>
+      </p:sp>
+      <p:sp>
+        <p:nvSpPr>
+          <p:cNvPr id="4" name="Slide Number Placeholder 3"/>
+          <p:cNvSpPr>
+            <a:spLocks noGrp="1"/>
+          </p:cNvSpPr>
+          <p:nvPr>
+            <p:ph type="sldNum" idx="5" sz="quarter"/>
+          </p:nvPr>
+        </p:nvSpPr>
+        <p:spPr/>
+      </p:sp>
+    </p:spTree>
+  </p:cSld>
+  <p:clrMapOvr>
+    <a:masterClrMapping/>
+  </p:clrMapOvr>
+</p:notes>
+</file>
+
+<file path=ppt/notesSlides/notesSlide9.xml><?xml version="1.0" encoding="utf-8"?>
+<p:notes xmlns:a="http://schemas.openxmlformats.org/drawingml/2006/main" xmlns:p="http://schemas.openxmlformats.org/presentationml/2006/main" xmlns:r="http://schemas.openxmlformats.org/officeDocument/2006/relationships">
+  <p:cSld>
+    <p:spTree>
+      <p:nvGrpSpPr>
+        <p:cNvPr id="1" name=""/>
+        <p:cNvGrpSpPr/>
+        <p:nvPr/>
+      </p:nvGrpSpPr>
+      <p:grpSpPr>
+        <a:xfrm>
+          <a:off x="0" y="0"/>
+          <a:ext cx="0" cy="0"/>
+          <a:chOff x="0" y="0"/>
+          <a:chExt cx="0" cy="0"/>
+        </a:xfrm>
+      </p:grpSpPr>
+      <p:sp>
+        <p:nvSpPr>
+          <p:cNvPr id="2" name="Slide Image Placeholder 1"/>
+          <p:cNvSpPr>
+            <a:spLocks noGrp="1"/>
+          </p:cNvSpPr>
+          <p:nvPr>
+            <p:ph type="sldImg" idx="2"/>
+          </p:nvPr>
+        </p:nvSpPr>
+        <p:spPr/>
+      </p:sp>
+      <p:sp>
+        <p:nvSpPr>
+          <p:cNvPr id="3" name="Notes Placeholder 2"/>
+          <p:cNvSpPr>
+            <a:spLocks noGrp="1"/>
+          </p:cNvSpPr>
+          <p:nvPr>
+            <p:ph type="body" idx="3" sz="quarter"/>
+          </p:nvPr>
+        </p:nvSpPr>
+        <p:spPr/>
+        <p:txBody>
+          <a:bodyPr/>
+          <a:lstStyle/>
+          <a:p>
+            <a:r>
+              <a:t>Concept diagram: What you built.</a:t>
             </a:r>
           </a:p>
         </p:txBody>
@@ -4209,6 +4280,372 @@
 </p:sld>
 </file>
 
+<file path=ppt/slides/slide10.xml><?xml version="1.0" encoding="utf-8"?>
+<p:sld xmlns:a="http://schemas.openxmlformats.org/drawingml/2006/main" xmlns:p="http://schemas.openxmlformats.org/presentationml/2006/main" xmlns:r="http://schemas.openxmlformats.org/officeDocument/2006/relationships">
+  <p:cSld>
+    <p:spTree>
+      <p:nvGrpSpPr>
+        <p:cNvPr id="1" name=""/>
+        <p:cNvGrpSpPr/>
+        <p:nvPr/>
+      </p:nvGrpSpPr>
+      <p:grpSpPr/>
+      <p:pic>
+        <p:nvPicPr>
+          <p:cNvPr id="2" name="Picture 1" descr="redhat_logo.jpg"/>
+          <p:cNvPicPr>
+            <a:picLocks noChangeAspect="1"/>
+          </p:cNvPicPr>
+          <p:nvPr/>
+        </p:nvPicPr>
+        <p:blipFill>
+          <a:blip r:embed="rId2"/>
+          <a:stretch>
+            <a:fillRect/>
+          </a:stretch>
+        </p:blipFill>
+        <p:spPr>
+          <a:xfrm>
+            <a:off x="10326319" y="475488"/>
+            <a:ext cx="1024128" cy="242248"/>
+          </a:xfrm>
+          <a:prstGeom prst="rect">
+            <a:avLst/>
+          </a:prstGeom>
+        </p:spPr>
+      </p:pic>
+      <p:sp>
+        <p:nvSpPr>
+          <p:cNvPr id="3" name="TextBox 2"/>
+          <p:cNvSpPr txBox="1"/>
+          <p:nvPr/>
+        </p:nvSpPr>
+        <p:spPr>
+          <a:xfrm>
+            <a:off x="841248" y="548640"/>
+            <a:ext cx="8595360" cy="274320"/>
+          </a:xfrm>
+          <a:prstGeom prst="rect">
+            <a:avLst/>
+          </a:prstGeom>
+          <a:noFill/>
+        </p:spPr>
+        <p:txBody>
+          <a:bodyPr wrap="square" anchor="t" lIns="0" rIns="0" tIns="0" bIns="0">
+            <a:spAutoFit/>
+          </a:bodyPr>
+          <a:lstStyle/>
+          <a:p>
+            <a:pPr algn="l">
+              <a:lnSpc>
+                <a:spcPct val="106000"/>
+              </a:lnSpc>
+              <a:spcBef>
+                <a:spcPts val="0"/>
+              </a:spcBef>
+              <a:spcAft>
+                <a:spcPts val="0"/>
+              </a:spcAft>
+            </a:pPr>
+            <a:r>
+              <a:rPr sz="1250" b="1" spc="220">
+                <a:solidFill>
+                  <a:srgbClr val="EE0000"/>
+                </a:solidFill>
+                <a:latin typeface="Red Hat Display"/>
+              </a:rPr>
+              <a:t>M15 · MULTI-TENANCY &amp; WORKLOAD SECURITY</a:t>
+            </a:r>
+          </a:p>
+        </p:txBody>
+      </p:sp>
+      <p:sp>
+        <p:nvSpPr>
+          <p:cNvPr id="4" name="TextBox 3"/>
+          <p:cNvSpPr txBox="1"/>
+          <p:nvPr/>
+        </p:nvSpPr>
+        <p:spPr>
+          <a:xfrm>
+            <a:off x="841248" y="877824"/>
+            <a:ext cx="10515600" cy="548640"/>
+          </a:xfrm>
+          <a:prstGeom prst="rect">
+            <a:avLst/>
+          </a:prstGeom>
+          <a:noFill/>
+        </p:spPr>
+        <p:txBody>
+          <a:bodyPr wrap="none" anchor="t" lIns="0" rIns="0" tIns="0" bIns="0">
+            <a:spAutoFit/>
+          </a:bodyPr>
+          <a:lstStyle/>
+          <a:p>
+            <a:pPr algn="l">
+              <a:lnSpc>
+                <a:spcPct val="100000"/>
+              </a:lnSpc>
+              <a:spcBef>
+                <a:spcPts val="0"/>
+              </a:spcBef>
+              <a:spcAft>
+                <a:spcPts val="0"/>
+              </a:spcAft>
+            </a:pPr>
+            <a:r>
+              <a:rPr sz="2500" b="1">
+                <a:solidFill>
+                  <a:srgbClr val="1A1A1A"/>
+                </a:solidFill>
+                <a:latin typeface="Red Hat Display"/>
+              </a:rPr>
+              <a:t>What you built</a:t>
+            </a:r>
+          </a:p>
+        </p:txBody>
+      </p:sp>
+      <p:cxnSp>
+        <p:nvCxnSpPr>
+          <p:cNvPr id="5" name="Connector 4"/>
+          <p:cNvCxnSpPr/>
+          <p:nvPr/>
+        </p:nvCxnSpPr>
+        <p:spPr>
+          <a:xfrm>
+            <a:off x="841248" y="1554480"/>
+            <a:ext cx="1371600" cy="0"/>
+          </a:xfrm>
+          <a:prstGeom prst="bentConnector3">
+            <a:avLst/>
+          </a:prstGeom>
+          <a:ln w="31750">
+            <a:solidFill>
+              <a:srgbClr val="EE0000"/>
+            </a:solidFill>
+          </a:ln>
+          <a:effectLst/>
+        </p:spPr>
+        <p:style>
+          <a:lnRef idx="2">
+            <a:schemeClr val="accent1"/>
+          </a:lnRef>
+          <a:fillRef idx="0">
+            <a:schemeClr val="accent1"/>
+          </a:fillRef>
+          <a:effectRef idx="1">
+            <a:schemeClr val="accent1"/>
+          </a:effectRef>
+          <a:fontRef idx="minor">
+            <a:schemeClr val="tx1"/>
+          </a:fontRef>
+        </p:style>
+      </p:cxnSp>
+      <p:sp>
+        <p:nvSpPr>
+          <p:cNvPr id="6" name="Rounded Rectangle 5"/>
+          <p:cNvSpPr/>
+          <p:nvPr/>
+        </p:nvSpPr>
+        <p:spPr>
+          <a:xfrm>
+            <a:off x="841248" y="2331720"/>
+            <a:ext cx="10509199" cy="3794760"/>
+          </a:xfrm>
+          <a:prstGeom prst="roundRect">
+            <a:avLst>
+              <a:gd name="adj" fmla="val 4000"/>
+            </a:avLst>
+          </a:prstGeom>
+          <a:solidFill>
+            <a:srgbClr val="FFFFFF"/>
+          </a:solidFill>
+          <a:ln w="15240">
+            <a:solidFill>
+              <a:srgbClr val="DDE1E6"/>
+            </a:solidFill>
+          </a:ln>
+          <a:effectLst/>
+        </p:spPr>
+        <p:style>
+          <a:lnRef idx="1">
+            <a:schemeClr val="accent1"/>
+          </a:lnRef>
+          <a:fillRef idx="3">
+            <a:schemeClr val="accent1"/>
+          </a:fillRef>
+          <a:effectRef idx="2">
+            <a:schemeClr val="accent1"/>
+          </a:effectRef>
+          <a:fontRef idx="minor">
+            <a:schemeClr val="lt1"/>
+          </a:fontRef>
+        </p:style>
+        <p:txBody>
+          <a:bodyPr rtlCol="0" anchor="ctr"/>
+          <a:lstStyle/>
+          <a:p>
+            <a:pPr algn="ctr"/>
+          </a:p>
+        </p:txBody>
+      </p:sp>
+      <p:pic>
+        <p:nvPicPr>
+          <p:cNvPr id="7" name="Picture 6" descr="04-what-you-built.png"/>
+          <p:cNvPicPr>
+            <a:picLocks noChangeAspect="1"/>
+          </p:cNvPicPr>
+          <p:nvPr/>
+        </p:nvPicPr>
+        <p:blipFill>
+          <a:blip r:embed="rId3"/>
+          <a:stretch>
+            <a:fillRect/>
+          </a:stretch>
+        </p:blipFill>
+        <p:spPr>
+          <a:xfrm>
+            <a:off x="5532789" y="2532888"/>
+            <a:ext cx="1126115" cy="3392424"/>
+          </a:xfrm>
+          <a:prstGeom prst="rect">
+            <a:avLst/>
+          </a:prstGeom>
+        </p:spPr>
+      </p:pic>
+      <p:cxnSp>
+        <p:nvCxnSpPr>
+          <p:cNvPr id="8" name="Connector 7"/>
+          <p:cNvCxnSpPr/>
+          <p:nvPr/>
+        </p:nvCxnSpPr>
+        <p:spPr>
+          <a:xfrm>
+            <a:off x="841248" y="6437376"/>
+            <a:ext cx="10509199" cy="0"/>
+          </a:xfrm>
+          <a:prstGeom prst="bentConnector3">
+            <a:avLst/>
+          </a:prstGeom>
+          <a:ln w="12700">
+            <a:solidFill>
+              <a:srgbClr val="DDE1E6"/>
+            </a:solidFill>
+          </a:ln>
+          <a:effectLst/>
+        </p:spPr>
+        <p:style>
+          <a:lnRef idx="2">
+            <a:schemeClr val="accent1"/>
+          </a:lnRef>
+          <a:fillRef idx="0">
+            <a:schemeClr val="accent1"/>
+          </a:fillRef>
+          <a:effectRef idx="1">
+            <a:schemeClr val="accent1"/>
+          </a:effectRef>
+          <a:fontRef idx="minor">
+            <a:schemeClr val="tx1"/>
+          </a:fontRef>
+        </p:style>
+      </p:cxnSp>
+      <p:sp>
+        <p:nvSpPr>
+          <p:cNvPr id="9" name="TextBox 8"/>
+          <p:cNvSpPr txBox="1"/>
+          <p:nvPr/>
+        </p:nvSpPr>
+        <p:spPr>
+          <a:xfrm>
+            <a:off x="841248" y="6473952"/>
+            <a:ext cx="7315200" cy="274320"/>
+          </a:xfrm>
+          <a:prstGeom prst="rect">
+            <a:avLst/>
+          </a:prstGeom>
+          <a:noFill/>
+        </p:spPr>
+        <p:txBody>
+          <a:bodyPr wrap="square" anchor="t" lIns="0" rIns="0" tIns="0" bIns="0">
+            <a:spAutoFit/>
+          </a:bodyPr>
+          <a:lstStyle/>
+          <a:p>
+            <a:pPr algn="l">
+              <a:lnSpc>
+                <a:spcPct val="106000"/>
+              </a:lnSpc>
+              <a:spcBef>
+                <a:spcPts val="0"/>
+              </a:spcBef>
+              <a:spcAft>
+                <a:spcPts val="0"/>
+              </a:spcAft>
+            </a:pPr>
+            <a:r>
+              <a:rPr sz="950" b="0">
+                <a:solidFill>
+                  <a:srgbClr val="8A9099"/>
+                </a:solidFill>
+                <a:latin typeface="Red Hat Text"/>
+              </a:rPr>
+              <a:t>CONFIDENTIAL</a:t>
+            </a:r>
+          </a:p>
+        </p:txBody>
+      </p:sp>
+      <p:sp>
+        <p:nvSpPr>
+          <p:cNvPr id="10" name="TextBox 9"/>
+          <p:cNvSpPr txBox="1"/>
+          <p:nvPr/>
+        </p:nvSpPr>
+        <p:spPr>
+          <a:xfrm>
+            <a:off x="10801807" y="6473952"/>
+            <a:ext cx="548640" cy="274320"/>
+          </a:xfrm>
+          <a:prstGeom prst="rect">
+            <a:avLst/>
+          </a:prstGeom>
+          <a:noFill/>
+        </p:spPr>
+        <p:txBody>
+          <a:bodyPr wrap="square" anchor="t" lIns="0" rIns="0" tIns="0" bIns="0">
+            <a:spAutoFit/>
+          </a:bodyPr>
+          <a:lstStyle/>
+          <a:p>
+            <a:pPr algn="r">
+              <a:lnSpc>
+                <a:spcPct val="106000"/>
+              </a:lnSpc>
+              <a:spcBef>
+                <a:spcPts val="0"/>
+              </a:spcBef>
+              <a:spcAft>
+                <a:spcPts val="0"/>
+              </a:spcAft>
+            </a:pPr>
+            <a:r>
+              <a:rPr sz="950" b="0">
+                <a:solidFill>
+                  <a:srgbClr val="8A9099"/>
+                </a:solidFill>
+                <a:latin typeface="Red Hat Text"/>
+              </a:rPr>
+              <a:t>9</a:t>
+            </a:r>
+          </a:p>
+        </p:txBody>
+      </p:sp>
+    </p:spTree>
+  </p:cSld>
+  <p:clrMapOvr>
+    <a:masterClrMapping/>
+  </p:clrMapOvr>
+</p:sld>
+</file>
+
 <file path=ppt/slides/slide2.xml><?xml version="1.0" encoding="utf-8"?>
 <p:sld xmlns:a="http://schemas.openxmlformats.org/drawingml/2006/main" xmlns:p="http://schemas.openxmlformats.org/presentationml/2006/main" xmlns:r="http://schemas.openxmlformats.org/officeDocument/2006/relationships">
   <p:cSld>
@@ -4378,11 +4815,11 @@
         <p:spPr>
           <a:xfrm>
             <a:off x="841248" y="2395728"/>
-            <a:ext cx="5715000" cy="530352"/>
+            <a:ext cx="5138928" cy="786384"/>
           </a:xfrm>
           <a:prstGeom prst="roundRect">
             <a:avLst>
-              <a:gd name="adj" fmla="val 6000"/>
+              <a:gd name="adj" fmla="val 7000"/>
             </a:avLst>
           </a:prstGeom>
           <a:solidFill>
@@ -4417,9 +4854,55 @@
           </a:p>
         </p:txBody>
       </p:sp>
+      <p:sp>
+        <p:nvSpPr>
+          <p:cNvPr id="7" name="Rounded Rectangle 6"/>
+          <p:cNvSpPr/>
+          <p:nvPr/>
+        </p:nvSpPr>
+        <p:spPr>
+          <a:xfrm>
+            <a:off x="987552" y="2532888"/>
+            <a:ext cx="512064" cy="512064"/>
+          </a:xfrm>
+          <a:prstGeom prst="roundRect">
+            <a:avLst>
+              <a:gd name="adj" fmla="val 26000"/>
+            </a:avLst>
+          </a:prstGeom>
+          <a:solidFill>
+            <a:srgbClr val="EE0000"/>
+          </a:solidFill>
+          <a:ln>
+            <a:noFill/>
+          </a:ln>
+          <a:effectLst/>
+        </p:spPr>
+        <p:style>
+          <a:lnRef idx="1">
+            <a:schemeClr val="accent1"/>
+          </a:lnRef>
+          <a:fillRef idx="3">
+            <a:schemeClr val="accent1"/>
+          </a:fillRef>
+          <a:effectRef idx="2">
+            <a:schemeClr val="accent1"/>
+          </a:effectRef>
+          <a:fontRef idx="minor">
+            <a:schemeClr val="lt1"/>
+          </a:fontRef>
+        </p:style>
+        <p:txBody>
+          <a:bodyPr rtlCol="0" anchor="ctr"/>
+          <a:lstStyle/>
+          <a:p>
+            <a:pPr algn="ctr"/>
+          </a:p>
+        </p:txBody>
+      </p:sp>
       <p:pic>
         <p:nvPicPr>
-          <p:cNvPr id="7" name="Picture 6" descr="check_steel.png"/>
+          <p:cNvPr id="8" name="Picture 7" descr="check_white.png"/>
           <p:cNvPicPr>
             <a:picLocks noChangeAspect="1"/>
           </p:cNvPicPr>
@@ -4433,8 +4916,8 @@
         </p:blipFill>
         <p:spPr>
           <a:xfrm>
-            <a:off x="987552" y="2542032"/>
-            <a:ext cx="237744" cy="237744"/>
+            <a:off x="1110447" y="2655783"/>
+            <a:ext cx="266273" cy="266273"/>
           </a:xfrm>
           <a:prstGeom prst="rect">
             <a:avLst/>
@@ -4443,14 +4926,14 @@
       </p:pic>
       <p:sp>
         <p:nvSpPr>
-          <p:cNvPr id="8" name="TextBox 7"/>
+          <p:cNvPr id="9" name="TextBox 8"/>
           <p:cNvSpPr txBox="1"/>
           <p:nvPr/>
         </p:nvSpPr>
         <p:spPr>
           <a:xfrm>
-            <a:off x="1353312" y="2395728"/>
-            <a:ext cx="5029200" cy="530352"/>
+            <a:off x="1627632" y="2395728"/>
+            <a:ext cx="4206240" cy="786384"/>
           </a:xfrm>
           <a:prstGeom prst="rect">
             <a:avLst/>
@@ -4475,7 +4958,7 @@
               </a:spcAft>
             </a:pPr>
             <a:r>
-              <a:rPr sz="1200" b="0">
+              <a:rPr sz="1150" b="0">
                 <a:solidFill>
                   <a:srgbClr val="1A1A1A"/>
                 </a:solidFill>
@@ -4488,18 +4971,18 @@
       </p:sp>
       <p:sp>
         <p:nvSpPr>
-          <p:cNvPr id="9" name="Rounded Rectangle 8"/>
+          <p:cNvPr id="10" name="Rounded Rectangle 9"/>
           <p:cNvSpPr/>
           <p:nvPr/>
         </p:nvSpPr>
         <p:spPr>
           <a:xfrm>
-            <a:off x="841248" y="2999232"/>
-            <a:ext cx="5715000" cy="530352"/>
+            <a:off x="6254496" y="2395728"/>
+            <a:ext cx="5138928" cy="786384"/>
           </a:xfrm>
           <a:prstGeom prst="roundRect">
             <a:avLst>
-              <a:gd name="adj" fmla="val 6000"/>
+              <a:gd name="adj" fmla="val 7000"/>
             </a:avLst>
           </a:prstGeom>
           <a:solidFill>
@@ -4534,9 +5017,55 @@
           </a:p>
         </p:txBody>
       </p:sp>
+      <p:sp>
+        <p:nvSpPr>
+          <p:cNvPr id="11" name="Rounded Rectangle 10"/>
+          <p:cNvSpPr/>
+          <p:nvPr/>
+        </p:nvSpPr>
+        <p:spPr>
+          <a:xfrm>
+            <a:off x="6400800" y="2532888"/>
+            <a:ext cx="512064" cy="512064"/>
+          </a:xfrm>
+          <a:prstGeom prst="roundRect">
+            <a:avLst>
+              <a:gd name="adj" fmla="val 26000"/>
+            </a:avLst>
+          </a:prstGeom>
+          <a:solidFill>
+            <a:srgbClr val="EE0000"/>
+          </a:solidFill>
+          <a:ln>
+            <a:noFill/>
+          </a:ln>
+          <a:effectLst/>
+        </p:spPr>
+        <p:style>
+          <a:lnRef idx="1">
+            <a:schemeClr val="accent1"/>
+          </a:lnRef>
+          <a:fillRef idx="3">
+            <a:schemeClr val="accent1"/>
+          </a:fillRef>
+          <a:effectRef idx="2">
+            <a:schemeClr val="accent1"/>
+          </a:effectRef>
+          <a:fontRef idx="minor">
+            <a:schemeClr val="lt1"/>
+          </a:fontRef>
+        </p:style>
+        <p:txBody>
+          <a:bodyPr rtlCol="0" anchor="ctr"/>
+          <a:lstStyle/>
+          <a:p>
+            <a:pPr algn="ctr"/>
+          </a:p>
+        </p:txBody>
+      </p:sp>
       <p:pic>
         <p:nvPicPr>
-          <p:cNvPr id="10" name="Picture 9" descr="check_steel.png"/>
+          <p:cNvPr id="12" name="Picture 11" descr="check_white.png"/>
           <p:cNvPicPr>
             <a:picLocks noChangeAspect="1"/>
           </p:cNvPicPr>
@@ -4550,8 +5079,8 @@
         </p:blipFill>
         <p:spPr>
           <a:xfrm>
-            <a:off x="987552" y="3145536"/>
-            <a:ext cx="237744" cy="237744"/>
+            <a:off x="6523695" y="2655783"/>
+            <a:ext cx="266273" cy="266273"/>
           </a:xfrm>
           <a:prstGeom prst="rect">
             <a:avLst/>
@@ -4560,14 +5089,14 @@
       </p:pic>
       <p:sp>
         <p:nvSpPr>
-          <p:cNvPr id="11" name="TextBox 10"/>
+          <p:cNvPr id="13" name="TextBox 12"/>
           <p:cNvSpPr txBox="1"/>
           <p:nvPr/>
         </p:nvSpPr>
         <p:spPr>
           <a:xfrm>
-            <a:off x="1353312" y="2999232"/>
-            <a:ext cx="5029200" cy="530352"/>
+            <a:off x="7040880" y="2395728"/>
+            <a:ext cx="4206240" cy="786384"/>
           </a:xfrm>
           <a:prstGeom prst="rect">
             <a:avLst/>
@@ -4592,7 +5121,7 @@
               </a:spcAft>
             </a:pPr>
             <a:r>
-              <a:rPr sz="1200" b="0">
+              <a:rPr sz="1150" b="0">
                 <a:solidFill>
                   <a:srgbClr val="1A1A1A"/>
                 </a:solidFill>
@@ -4605,18 +5134,18 @@
       </p:sp>
       <p:sp>
         <p:nvSpPr>
-          <p:cNvPr id="12" name="Rounded Rectangle 11"/>
+          <p:cNvPr id="14" name="Rounded Rectangle 13"/>
           <p:cNvSpPr/>
           <p:nvPr/>
         </p:nvSpPr>
         <p:spPr>
           <a:xfrm>
-            <a:off x="841248" y="3602736"/>
-            <a:ext cx="5715000" cy="530352"/>
+            <a:off x="841248" y="3328416"/>
+            <a:ext cx="5138928" cy="786384"/>
           </a:xfrm>
           <a:prstGeom prst="roundRect">
             <a:avLst>
-              <a:gd name="adj" fmla="val 6000"/>
+              <a:gd name="adj" fmla="val 7000"/>
             </a:avLst>
           </a:prstGeom>
           <a:solidFill>
@@ -4651,9 +5180,55 @@
           </a:p>
         </p:txBody>
       </p:sp>
+      <p:sp>
+        <p:nvSpPr>
+          <p:cNvPr id="15" name="Rounded Rectangle 14"/>
+          <p:cNvSpPr/>
+          <p:nvPr/>
+        </p:nvSpPr>
+        <p:spPr>
+          <a:xfrm>
+            <a:off x="987552" y="3465576"/>
+            <a:ext cx="512064" cy="512064"/>
+          </a:xfrm>
+          <a:prstGeom prst="roundRect">
+            <a:avLst>
+              <a:gd name="adj" fmla="val 26000"/>
+            </a:avLst>
+          </a:prstGeom>
+          <a:solidFill>
+            <a:srgbClr val="EE0000"/>
+          </a:solidFill>
+          <a:ln>
+            <a:noFill/>
+          </a:ln>
+          <a:effectLst/>
+        </p:spPr>
+        <p:style>
+          <a:lnRef idx="1">
+            <a:schemeClr val="accent1"/>
+          </a:lnRef>
+          <a:fillRef idx="3">
+            <a:schemeClr val="accent1"/>
+          </a:fillRef>
+          <a:effectRef idx="2">
+            <a:schemeClr val="accent1"/>
+          </a:effectRef>
+          <a:fontRef idx="minor">
+            <a:schemeClr val="lt1"/>
+          </a:fontRef>
+        </p:style>
+        <p:txBody>
+          <a:bodyPr rtlCol="0" anchor="ctr"/>
+          <a:lstStyle/>
+          <a:p>
+            <a:pPr algn="ctr"/>
+          </a:p>
+        </p:txBody>
+      </p:sp>
       <p:pic>
         <p:nvPicPr>
-          <p:cNvPr id="13" name="Picture 12" descr="check_steel.png"/>
+          <p:cNvPr id="16" name="Picture 15" descr="check_white.png"/>
           <p:cNvPicPr>
             <a:picLocks noChangeAspect="1"/>
           </p:cNvPicPr>
@@ -4667,8 +5242,8 @@
         </p:blipFill>
         <p:spPr>
           <a:xfrm>
-            <a:off x="987552" y="3749040"/>
-            <a:ext cx="237744" cy="237744"/>
+            <a:off x="1110447" y="3588471"/>
+            <a:ext cx="266273" cy="266273"/>
           </a:xfrm>
           <a:prstGeom prst="rect">
             <a:avLst/>
@@ -4677,14 +5252,14 @@
       </p:pic>
       <p:sp>
         <p:nvSpPr>
-          <p:cNvPr id="14" name="TextBox 13"/>
+          <p:cNvPr id="17" name="TextBox 16"/>
           <p:cNvSpPr txBox="1"/>
           <p:nvPr/>
         </p:nvSpPr>
         <p:spPr>
           <a:xfrm>
-            <a:off x="1353312" y="3602736"/>
-            <a:ext cx="5029200" cy="530352"/>
+            <a:off x="1627632" y="3328416"/>
+            <a:ext cx="4206240" cy="786384"/>
           </a:xfrm>
           <a:prstGeom prst="rect">
             <a:avLst/>
@@ -4709,7 +5284,7 @@
               </a:spcAft>
             </a:pPr>
             <a:r>
-              <a:rPr sz="1200" b="0">
+              <a:rPr sz="1150" b="0">
                 <a:solidFill>
                   <a:srgbClr val="1A1A1A"/>
                 </a:solidFill>
@@ -4722,18 +5297,18 @@
       </p:sp>
       <p:sp>
         <p:nvSpPr>
-          <p:cNvPr id="15" name="Rounded Rectangle 14"/>
+          <p:cNvPr id="18" name="Rounded Rectangle 17"/>
           <p:cNvSpPr/>
           <p:nvPr/>
         </p:nvSpPr>
         <p:spPr>
           <a:xfrm>
-            <a:off x="841248" y="4206240"/>
-            <a:ext cx="5715000" cy="530352"/>
+            <a:off x="6254496" y="3328416"/>
+            <a:ext cx="5138928" cy="786384"/>
           </a:xfrm>
           <a:prstGeom prst="roundRect">
             <a:avLst>
-              <a:gd name="adj" fmla="val 6000"/>
+              <a:gd name="adj" fmla="val 7000"/>
             </a:avLst>
           </a:prstGeom>
           <a:solidFill>
@@ -4768,9 +5343,55 @@
           </a:p>
         </p:txBody>
       </p:sp>
+      <p:sp>
+        <p:nvSpPr>
+          <p:cNvPr id="19" name="Rounded Rectangle 18"/>
+          <p:cNvSpPr/>
+          <p:nvPr/>
+        </p:nvSpPr>
+        <p:spPr>
+          <a:xfrm>
+            <a:off x="6400800" y="3465576"/>
+            <a:ext cx="512064" cy="512064"/>
+          </a:xfrm>
+          <a:prstGeom prst="roundRect">
+            <a:avLst>
+              <a:gd name="adj" fmla="val 26000"/>
+            </a:avLst>
+          </a:prstGeom>
+          <a:solidFill>
+            <a:srgbClr val="EE0000"/>
+          </a:solidFill>
+          <a:ln>
+            <a:noFill/>
+          </a:ln>
+          <a:effectLst/>
+        </p:spPr>
+        <p:style>
+          <a:lnRef idx="1">
+            <a:schemeClr val="accent1"/>
+          </a:lnRef>
+          <a:fillRef idx="3">
+            <a:schemeClr val="accent1"/>
+          </a:fillRef>
+          <a:effectRef idx="2">
+            <a:schemeClr val="accent1"/>
+          </a:effectRef>
+          <a:fontRef idx="minor">
+            <a:schemeClr val="lt1"/>
+          </a:fontRef>
+        </p:style>
+        <p:txBody>
+          <a:bodyPr rtlCol="0" anchor="ctr"/>
+          <a:lstStyle/>
+          <a:p>
+            <a:pPr algn="ctr"/>
+          </a:p>
+        </p:txBody>
+      </p:sp>
       <p:pic>
         <p:nvPicPr>
-          <p:cNvPr id="16" name="Picture 15" descr="check_steel.png"/>
+          <p:cNvPr id="20" name="Picture 19" descr="check_white.png"/>
           <p:cNvPicPr>
             <a:picLocks noChangeAspect="1"/>
           </p:cNvPicPr>
@@ -4784,8 +5405,8 @@
         </p:blipFill>
         <p:spPr>
           <a:xfrm>
-            <a:off x="987552" y="4352544"/>
-            <a:ext cx="237744" cy="237744"/>
+            <a:off x="6523695" y="3588471"/>
+            <a:ext cx="266273" cy="266273"/>
           </a:xfrm>
           <a:prstGeom prst="rect">
             <a:avLst/>
@@ -4794,14 +5415,14 @@
       </p:pic>
       <p:sp>
         <p:nvSpPr>
-          <p:cNvPr id="17" name="TextBox 16"/>
+          <p:cNvPr id="21" name="TextBox 20"/>
           <p:cNvSpPr txBox="1"/>
           <p:nvPr/>
         </p:nvSpPr>
         <p:spPr>
           <a:xfrm>
-            <a:off x="1353312" y="4206240"/>
-            <a:ext cx="5029200" cy="530352"/>
+            <a:off x="7040880" y="3328416"/>
+            <a:ext cx="4206240" cy="786384"/>
           </a:xfrm>
           <a:prstGeom prst="rect">
             <a:avLst/>
@@ -4826,7 +5447,7 @@
               </a:spcAft>
             </a:pPr>
             <a:r>
-              <a:rPr sz="1200" b="0">
+              <a:rPr sz="1150" b="0">
                 <a:solidFill>
                   <a:srgbClr val="1A1A1A"/>
                 </a:solidFill>
@@ -4839,18 +5460,18 @@
       </p:sp>
       <p:sp>
         <p:nvSpPr>
-          <p:cNvPr id="18" name="Rounded Rectangle 17"/>
+          <p:cNvPr id="22" name="Rounded Rectangle 21"/>
           <p:cNvSpPr/>
           <p:nvPr/>
         </p:nvSpPr>
         <p:spPr>
           <a:xfrm>
-            <a:off x="841248" y="4809744"/>
-            <a:ext cx="5715000" cy="530352"/>
+            <a:off x="841248" y="4261104"/>
+            <a:ext cx="5138928" cy="786384"/>
           </a:xfrm>
           <a:prstGeom prst="roundRect">
             <a:avLst>
-              <a:gd name="adj" fmla="val 6000"/>
+              <a:gd name="adj" fmla="val 7000"/>
             </a:avLst>
           </a:prstGeom>
           <a:solidFill>
@@ -4885,9 +5506,55 @@
           </a:p>
         </p:txBody>
       </p:sp>
+      <p:sp>
+        <p:nvSpPr>
+          <p:cNvPr id="23" name="Rounded Rectangle 22"/>
+          <p:cNvSpPr/>
+          <p:nvPr/>
+        </p:nvSpPr>
+        <p:spPr>
+          <a:xfrm>
+            <a:off x="987552" y="4398264"/>
+            <a:ext cx="512064" cy="512064"/>
+          </a:xfrm>
+          <a:prstGeom prst="roundRect">
+            <a:avLst>
+              <a:gd name="adj" fmla="val 26000"/>
+            </a:avLst>
+          </a:prstGeom>
+          <a:solidFill>
+            <a:srgbClr val="EE0000"/>
+          </a:solidFill>
+          <a:ln>
+            <a:noFill/>
+          </a:ln>
+          <a:effectLst/>
+        </p:spPr>
+        <p:style>
+          <a:lnRef idx="1">
+            <a:schemeClr val="accent1"/>
+          </a:lnRef>
+          <a:fillRef idx="3">
+            <a:schemeClr val="accent1"/>
+          </a:fillRef>
+          <a:effectRef idx="2">
+            <a:schemeClr val="accent1"/>
+          </a:effectRef>
+          <a:fontRef idx="minor">
+            <a:schemeClr val="lt1"/>
+          </a:fontRef>
+        </p:style>
+        <p:txBody>
+          <a:bodyPr rtlCol="0" anchor="ctr"/>
+          <a:lstStyle/>
+          <a:p>
+            <a:pPr algn="ctr"/>
+          </a:p>
+        </p:txBody>
+      </p:sp>
       <p:pic>
         <p:nvPicPr>
-          <p:cNvPr id="19" name="Picture 18" descr="check_steel.png"/>
+          <p:cNvPr id="24" name="Picture 23" descr="check_white.png"/>
           <p:cNvPicPr>
             <a:picLocks noChangeAspect="1"/>
           </p:cNvPicPr>
@@ -4901,8 +5568,8 @@
         </p:blipFill>
         <p:spPr>
           <a:xfrm>
-            <a:off x="987552" y="4956048"/>
-            <a:ext cx="237744" cy="237744"/>
+            <a:off x="1110447" y="4521159"/>
+            <a:ext cx="266273" cy="266273"/>
           </a:xfrm>
           <a:prstGeom prst="rect">
             <a:avLst/>
@@ -4911,14 +5578,14 @@
       </p:pic>
       <p:sp>
         <p:nvSpPr>
-          <p:cNvPr id="20" name="TextBox 19"/>
+          <p:cNvPr id="25" name="TextBox 24"/>
           <p:cNvSpPr txBox="1"/>
           <p:nvPr/>
         </p:nvSpPr>
         <p:spPr>
           <a:xfrm>
-            <a:off x="1353312" y="4809744"/>
-            <a:ext cx="5029200" cy="530352"/>
+            <a:off x="1627632" y="4261104"/>
+            <a:ext cx="4206240" cy="786384"/>
           </a:xfrm>
           <a:prstGeom prst="rect">
             <a:avLst/>
@@ -4943,221 +5610,13 @@
               </a:spcAft>
             </a:pPr>
             <a:r>
-              <a:rPr sz="1200" b="0">
+              <a:rPr sz="1150" b="0">
                 <a:solidFill>
                   <a:srgbClr val="1A1A1A"/>
                 </a:solidFill>
                 <a:latin typeface="Red Hat Text"/>
               </a:rPr>
               <a:t>Speed for the team, safety for the cluster</a:t>
-            </a:r>
-          </a:p>
-        </p:txBody>
-      </p:sp>
-      <p:sp>
-        <p:nvSpPr>
-          <p:cNvPr id="21" name="Rounded Rectangle 20"/>
-          <p:cNvSpPr/>
-          <p:nvPr/>
-        </p:nvSpPr>
-        <p:spPr>
-          <a:xfrm>
-            <a:off x="6812280" y="2395728"/>
-            <a:ext cx="4538167" cy="2944368"/>
-          </a:xfrm>
-          <a:prstGeom prst="roundRect">
-            <a:avLst>
-              <a:gd name="adj" fmla="val 4000"/>
-            </a:avLst>
-          </a:prstGeom>
-          <a:solidFill>
-            <a:srgbClr val="FFFFFF"/>
-          </a:solidFill>
-          <a:ln w="15240">
-            <a:solidFill>
-              <a:srgbClr val="DDE1E6"/>
-            </a:solidFill>
-          </a:ln>
-          <a:effectLst/>
-        </p:spPr>
-        <p:style>
-          <a:lnRef idx="1">
-            <a:schemeClr val="accent1"/>
-          </a:lnRef>
-          <a:fillRef idx="3">
-            <a:schemeClr val="accent1"/>
-          </a:fillRef>
-          <a:effectRef idx="2">
-            <a:schemeClr val="accent1"/>
-          </a:effectRef>
-          <a:fontRef idx="minor">
-            <a:schemeClr val="lt1"/>
-          </a:fontRef>
-        </p:style>
-        <p:txBody>
-          <a:bodyPr rtlCol="0" anchor="ctr"/>
-          <a:lstStyle/>
-          <a:p>
-            <a:pPr algn="ctr"/>
-          </a:p>
-        </p:txBody>
-      </p:sp>
-      <p:sp>
-        <p:nvSpPr>
-          <p:cNvPr id="22" name="Rounded Rectangle 21"/>
-          <p:cNvSpPr/>
-          <p:nvPr/>
-        </p:nvSpPr>
-        <p:spPr>
-          <a:xfrm>
-            <a:off x="7013448" y="2596896"/>
-            <a:ext cx="1298448" cy="310896"/>
-          </a:xfrm>
-          <a:prstGeom prst="roundRect">
-            <a:avLst>
-              <a:gd name="adj" fmla="val 50000"/>
-            </a:avLst>
-          </a:prstGeom>
-          <a:solidFill>
-            <a:srgbClr val="FCECEC"/>
-          </a:solidFill>
-          <a:ln>
-            <a:noFill/>
-          </a:ln>
-          <a:effectLst/>
-        </p:spPr>
-        <p:style>
-          <a:lnRef idx="1">
-            <a:schemeClr val="accent1"/>
-          </a:lnRef>
-          <a:fillRef idx="3">
-            <a:schemeClr val="accent1"/>
-          </a:fillRef>
-          <a:effectRef idx="2">
-            <a:schemeClr val="accent1"/>
-          </a:effectRef>
-          <a:fontRef idx="minor">
-            <a:schemeClr val="lt1"/>
-          </a:fontRef>
-        </p:style>
-        <p:txBody>
-          <a:bodyPr rtlCol="0" anchor="ctr"/>
-          <a:lstStyle/>
-          <a:p>
-            <a:pPr algn="ctr"/>
-          </a:p>
-        </p:txBody>
-      </p:sp>
-      <p:sp>
-        <p:nvSpPr>
-          <p:cNvPr id="23" name="TextBox 22"/>
-          <p:cNvSpPr txBox="1"/>
-          <p:nvPr/>
-        </p:nvSpPr>
-        <p:spPr>
-          <a:xfrm>
-            <a:off x="7013448" y="2596896"/>
-            <a:ext cx="1298448" cy="310896"/>
-          </a:xfrm>
-          <a:prstGeom prst="rect">
-            <a:avLst/>
-          </a:prstGeom>
-          <a:noFill/>
-        </p:spPr>
-        <p:txBody>
-          <a:bodyPr wrap="none" anchor="ctr" lIns="0" rIns="0" tIns="0" bIns="0">
-            <a:spAutoFit/>
-          </a:bodyPr>
-          <a:lstStyle/>
-          <a:p>
-            <a:pPr algn="ctr">
-              <a:lnSpc>
-                <a:spcPct val="106000"/>
-              </a:lnSpc>
-              <a:spcBef>
-                <a:spcPts val="0"/>
-              </a:spcBef>
-              <a:spcAft>
-                <a:spcPts val="0"/>
-              </a:spcAft>
-            </a:pPr>
-            <a:r>
-              <a:rPr sz="850" b="1">
-                <a:solidFill>
-                  <a:srgbClr val="B80000"/>
-                </a:solidFill>
-                <a:latin typeface="Red Hat Display"/>
-              </a:rPr>
-              <a:t>MEDIA PASS</a:t>
-            </a:r>
-          </a:p>
-        </p:txBody>
-      </p:sp>
-      <p:pic>
-        <p:nvPicPr>
-          <p:cNvPr id="24" name="Picture 23" descr="eye_slate.png"/>
-          <p:cNvPicPr>
-            <a:picLocks noChangeAspect="1"/>
-          </p:cNvPicPr>
-          <p:nvPr/>
-        </p:nvPicPr>
-        <p:blipFill>
-          <a:blip r:embed="rId4"/>
-          <a:stretch>
-            <a:fillRect/>
-          </a:stretch>
-        </p:blipFill>
-        <p:spPr>
-          <a:xfrm>
-            <a:off x="8843619" y="3108960"/>
-            <a:ext cx="475488" cy="475488"/>
-          </a:xfrm>
-          <a:prstGeom prst="rect">
-            <a:avLst/>
-          </a:prstGeom>
-        </p:spPr>
-      </p:pic>
-      <p:sp>
-        <p:nvSpPr>
-          <p:cNvPr id="25" name="TextBox 24"/>
-          <p:cNvSpPr txBox="1"/>
-          <p:nvPr/>
-        </p:nvSpPr>
-        <p:spPr>
-          <a:xfrm>
-            <a:off x="7050024" y="3721608"/>
-            <a:ext cx="4062679" cy="1481328"/>
-          </a:xfrm>
-          <a:prstGeom prst="rect">
-            <a:avLst/>
-          </a:prstGeom>
-          <a:noFill/>
-        </p:spPr>
-        <p:txBody>
-          <a:bodyPr wrap="square" anchor="t" lIns="0" rIns="0" tIns="0" bIns="0">
-            <a:spAutoFit/>
-          </a:bodyPr>
-          <a:lstStyle/>
-          <a:p>
-            <a:pPr algn="l">
-              <a:lnSpc>
-                <a:spcPct val="120000"/>
-              </a:lnSpc>
-              <a:spcBef>
-                <a:spcPts val="0"/>
-              </a:spcBef>
-              <a:spcAft>
-                <a:spcPts val="0"/>
-              </a:spcAft>
-            </a:pPr>
-            <a:r>
-              <a:rPr sz="950" b="0">
-                <a:solidFill>
-                  <a:srgbClr val="8A9099"/>
-                </a:solidFill>
-                <a:latin typeface="Red Hat Text"/>
-              </a:rPr>
-              <a:t>A "payments team" box (three env sub-boxes + two teammate icons + one workload) sitting inside a larger shared-cluster frame, with a dotted "guardrails" ring between them.</a:t>
             </a:r>
           </a:p>
         </p:txBody>
@@ -5465,7 +5924,7 @@
         <p:spPr>
           <a:xfrm>
             <a:off x="841248" y="2395728"/>
-            <a:ext cx="5715000" cy="530352"/>
+            <a:ext cx="4160520" cy="475488"/>
           </a:xfrm>
           <a:prstGeom prst="roundRect">
             <a:avLst>
@@ -5520,8 +5979,8 @@
         </p:blipFill>
         <p:spPr>
           <a:xfrm>
-            <a:off x="987552" y="2542032"/>
-            <a:ext cx="237744" cy="237744"/>
+            <a:off x="969264" y="2532888"/>
+            <a:ext cx="201168" cy="201168"/>
           </a:xfrm>
           <a:prstGeom prst="rect">
             <a:avLst/>
@@ -5536,8 +5995,8 @@
         </p:nvSpPr>
         <p:spPr>
           <a:xfrm>
-            <a:off x="1353312" y="2395728"/>
-            <a:ext cx="5029200" cy="530352"/>
+            <a:off x="1280160" y="2395728"/>
+            <a:ext cx="3593591" cy="475488"/>
           </a:xfrm>
           <a:prstGeom prst="rect">
             <a:avLst/>
@@ -5562,7 +6021,7 @@
               </a:spcAft>
             </a:pPr>
             <a:r>
-              <a:rPr sz="1200" b="0">
+              <a:rPr sz="1050" b="0">
                 <a:solidFill>
                   <a:srgbClr val="1A1A1A"/>
                 </a:solidFill>
@@ -5581,8 +6040,8 @@
         </p:nvSpPr>
         <p:spPr>
           <a:xfrm>
-            <a:off x="841248" y="2999232"/>
-            <a:ext cx="5715000" cy="530352"/>
+            <a:off x="841248" y="2944368"/>
+            <a:ext cx="4160520" cy="475488"/>
           </a:xfrm>
           <a:prstGeom prst="roundRect">
             <a:avLst>
@@ -5637,8 +6096,8 @@
         </p:blipFill>
         <p:spPr>
           <a:xfrm>
-            <a:off x="987552" y="3145536"/>
-            <a:ext cx="237744" cy="237744"/>
+            <a:off x="969264" y="3081528"/>
+            <a:ext cx="201168" cy="201168"/>
           </a:xfrm>
           <a:prstGeom prst="rect">
             <a:avLst/>
@@ -5653,8 +6112,8 @@
         </p:nvSpPr>
         <p:spPr>
           <a:xfrm>
-            <a:off x="1353312" y="2999232"/>
-            <a:ext cx="5029200" cy="530352"/>
+            <a:off x="1280160" y="2944368"/>
+            <a:ext cx="3593591" cy="475488"/>
           </a:xfrm>
           <a:prstGeom prst="rect">
             <a:avLst/>
@@ -5679,7 +6138,7 @@
               </a:spcAft>
             </a:pPr>
             <a:r>
-              <a:rPr sz="1200" b="0">
+              <a:rPr sz="1050" b="0">
                 <a:solidFill>
                   <a:srgbClr val="1A1A1A"/>
                 </a:solidFill>
@@ -5698,8 +6157,8 @@
         </p:nvSpPr>
         <p:spPr>
           <a:xfrm>
-            <a:off x="841248" y="3602736"/>
-            <a:ext cx="5715000" cy="530352"/>
+            <a:off x="841248" y="3493008"/>
+            <a:ext cx="4160520" cy="475488"/>
           </a:xfrm>
           <a:prstGeom prst="roundRect">
             <a:avLst>
@@ -5754,8 +6213,8 @@
         </p:blipFill>
         <p:spPr>
           <a:xfrm>
-            <a:off x="987552" y="3749040"/>
-            <a:ext cx="237744" cy="237744"/>
+            <a:off x="969264" y="3630168"/>
+            <a:ext cx="201168" cy="201168"/>
           </a:xfrm>
           <a:prstGeom prst="rect">
             <a:avLst/>
@@ -5770,8 +6229,8 @@
         </p:nvSpPr>
         <p:spPr>
           <a:xfrm>
-            <a:off x="1353312" y="3602736"/>
-            <a:ext cx="5029200" cy="530352"/>
+            <a:off x="1280160" y="3493008"/>
+            <a:ext cx="3593591" cy="475488"/>
           </a:xfrm>
           <a:prstGeom prst="rect">
             <a:avLst/>
@@ -5796,7 +6255,7 @@
               </a:spcAft>
             </a:pPr>
             <a:r>
-              <a:rPr sz="1200" b="0">
+              <a:rPr sz="1050" b="0">
                 <a:solidFill>
                   <a:srgbClr val="1A1A1A"/>
                 </a:solidFill>
@@ -5815,8 +6274,8 @@
         </p:nvSpPr>
         <p:spPr>
           <a:xfrm>
-            <a:off x="841248" y="4206240"/>
-            <a:ext cx="5715000" cy="530352"/>
+            <a:off x="841248" y="4041648"/>
+            <a:ext cx="4160520" cy="475488"/>
           </a:xfrm>
           <a:prstGeom prst="roundRect">
             <a:avLst>
@@ -5871,8 +6330,8 @@
         </p:blipFill>
         <p:spPr>
           <a:xfrm>
-            <a:off x="987552" y="4352544"/>
-            <a:ext cx="237744" cy="237744"/>
+            <a:off x="969264" y="4178807"/>
+            <a:ext cx="201168" cy="201168"/>
           </a:xfrm>
           <a:prstGeom prst="rect">
             <a:avLst/>
@@ -5887,8 +6346,8 @@
         </p:nvSpPr>
         <p:spPr>
           <a:xfrm>
-            <a:off x="1353312" y="4206240"/>
-            <a:ext cx="5029200" cy="530352"/>
+            <a:off x="1280160" y="4041648"/>
+            <a:ext cx="3593591" cy="475488"/>
           </a:xfrm>
           <a:prstGeom prst="rect">
             <a:avLst/>
@@ -5913,7 +6372,7 @@
               </a:spcAft>
             </a:pPr>
             <a:r>
-              <a:rPr sz="1200" b="0">
+              <a:rPr sz="1050" b="0">
                 <a:solidFill>
                   <a:srgbClr val="1A1A1A"/>
                 </a:solidFill>
@@ -5932,8 +6391,8 @@
         </p:nvSpPr>
         <p:spPr>
           <a:xfrm>
-            <a:off x="841248" y="4809744"/>
-            <a:ext cx="5715000" cy="530352"/>
+            <a:off x="841248" y="4590288"/>
+            <a:ext cx="4160520" cy="475488"/>
           </a:xfrm>
           <a:prstGeom prst="roundRect">
             <a:avLst>
@@ -5988,8 +6447,8 @@
         </p:blipFill>
         <p:spPr>
           <a:xfrm>
-            <a:off x="987552" y="4956048"/>
-            <a:ext cx="237744" cy="237744"/>
+            <a:off x="969264" y="4727447"/>
+            <a:ext cx="201168" cy="201168"/>
           </a:xfrm>
           <a:prstGeom prst="rect">
             <a:avLst/>
@@ -6004,8 +6463,8 @@
         </p:nvSpPr>
         <p:spPr>
           <a:xfrm>
-            <a:off x="1353312" y="4809744"/>
-            <a:ext cx="5029200" cy="530352"/>
+            <a:off x="1280160" y="4590288"/>
+            <a:ext cx="3593591" cy="475488"/>
           </a:xfrm>
           <a:prstGeom prst="rect">
             <a:avLst/>
@@ -6030,7 +6489,7 @@
               </a:spcAft>
             </a:pPr>
             <a:r>
-              <a:rPr sz="1200" b="0">
+              <a:rPr sz="1050" b="0">
                 <a:solidFill>
                   <a:srgbClr val="1A1A1A"/>
                 </a:solidFill>
@@ -6049,8 +6508,8 @@
         </p:nvSpPr>
         <p:spPr>
           <a:xfrm>
-            <a:off x="6812280" y="2395728"/>
-            <a:ext cx="4538167" cy="2944368"/>
+            <a:off x="5385816" y="3468588"/>
+            <a:ext cx="5964631" cy="597479"/>
           </a:xfrm>
           <a:prstGeom prst="roundRect">
             <a:avLst>
@@ -6089,100 +6548,9 @@
           </a:p>
         </p:txBody>
       </p:sp>
-      <p:sp>
-        <p:nvSpPr>
-          <p:cNvPr id="22" name="Rounded Rectangle 21"/>
-          <p:cNvSpPr/>
-          <p:nvPr/>
-        </p:nvSpPr>
-        <p:spPr>
-          <a:xfrm>
-            <a:off x="7013448" y="2596896"/>
-            <a:ext cx="1298448" cy="310896"/>
-          </a:xfrm>
-          <a:prstGeom prst="roundRect">
-            <a:avLst>
-              <a:gd name="adj" fmla="val 50000"/>
-            </a:avLst>
-          </a:prstGeom>
-          <a:solidFill>
-            <a:srgbClr val="FCECEC"/>
-          </a:solidFill>
-          <a:ln>
-            <a:noFill/>
-          </a:ln>
-          <a:effectLst/>
-        </p:spPr>
-        <p:style>
-          <a:lnRef idx="1">
-            <a:schemeClr val="accent1"/>
-          </a:lnRef>
-          <a:fillRef idx="3">
-            <a:schemeClr val="accent1"/>
-          </a:fillRef>
-          <a:effectRef idx="2">
-            <a:schemeClr val="accent1"/>
-          </a:effectRef>
-          <a:fontRef idx="minor">
-            <a:schemeClr val="lt1"/>
-          </a:fontRef>
-        </p:style>
-        <p:txBody>
-          <a:bodyPr rtlCol="0" anchor="ctr"/>
-          <a:lstStyle/>
-          <a:p>
-            <a:pPr algn="ctr"/>
-          </a:p>
-        </p:txBody>
-      </p:sp>
-      <p:sp>
-        <p:nvSpPr>
-          <p:cNvPr id="23" name="TextBox 22"/>
-          <p:cNvSpPr txBox="1"/>
-          <p:nvPr/>
-        </p:nvSpPr>
-        <p:spPr>
-          <a:xfrm>
-            <a:off x="7013448" y="2596896"/>
-            <a:ext cx="1298448" cy="310896"/>
-          </a:xfrm>
-          <a:prstGeom prst="rect">
-            <a:avLst/>
-          </a:prstGeom>
-          <a:noFill/>
-        </p:spPr>
-        <p:txBody>
-          <a:bodyPr wrap="none" anchor="ctr" lIns="0" rIns="0" tIns="0" bIns="0">
-            <a:spAutoFit/>
-          </a:bodyPr>
-          <a:lstStyle/>
-          <a:p>
-            <a:pPr algn="ctr">
-              <a:lnSpc>
-                <a:spcPct val="106000"/>
-              </a:lnSpc>
-              <a:spcBef>
-                <a:spcPts val="0"/>
-              </a:spcBef>
-              <a:spcAft>
-                <a:spcPts val="0"/>
-              </a:spcAft>
-            </a:pPr>
-            <a:r>
-              <a:rPr sz="850" b="1">
-                <a:solidFill>
-                  <a:srgbClr val="B80000"/>
-                </a:solidFill>
-                <a:latin typeface="Red Hat Display"/>
-              </a:rPr>
-              <a:t>MEDIA PASS</a:t>
-            </a:r>
-          </a:p>
-        </p:txBody>
-      </p:sp>
       <p:pic>
         <p:nvPicPr>
-          <p:cNvPr id="24" name="Picture 23" descr="eye_slate.png"/>
+          <p:cNvPr id="22" name="Picture 21" descr="01-identity-flow.png"/>
           <p:cNvPicPr>
             <a:picLocks noChangeAspect="1"/>
           </p:cNvPicPr>
@@ -6196,62 +6564,17 @@
         </p:blipFill>
         <p:spPr>
           <a:xfrm>
-            <a:off x="8843619" y="3108960"/>
-            <a:ext cx="475488" cy="475488"/>
+            <a:off x="5532120" y="3614892"/>
+            <a:ext cx="5672023" cy="304871"/>
           </a:xfrm>
           <a:prstGeom prst="rect">
             <a:avLst/>
           </a:prstGeom>
         </p:spPr>
       </p:pic>
-      <p:sp>
-        <p:nvSpPr>
-          <p:cNvPr id="25" name="TextBox 24"/>
-          <p:cNvSpPr txBox="1"/>
-          <p:nvPr/>
-        </p:nvSpPr>
-        <p:spPr>
-          <a:xfrm>
-            <a:off x="7050024" y="3721608"/>
-            <a:ext cx="4062679" cy="1481328"/>
-          </a:xfrm>
-          <a:prstGeom prst="rect">
-            <a:avLst/>
-          </a:prstGeom>
-          <a:noFill/>
-        </p:spPr>
-        <p:txBody>
-          <a:bodyPr wrap="square" anchor="t" lIns="0" rIns="0" tIns="0" bIns="0">
-            <a:spAutoFit/>
-          </a:bodyPr>
-          <a:lstStyle/>
-          <a:p>
-            <a:pPr algn="l">
-              <a:lnSpc>
-                <a:spcPct val="120000"/>
-              </a:lnSpc>
-              <a:spcBef>
-                <a:spcPts val="0"/>
-              </a:spcBef>
-              <a:spcAft>
-                <a:spcPts val="0"/>
-              </a:spcAft>
-            </a:pPr>
-            <a:r>
-              <a:rPr sz="950" b="0">
-                <a:solidFill>
-                  <a:srgbClr val="8A9099"/>
-                </a:solidFill>
-                <a:latin typeface="Red Hat Text"/>
-              </a:rPr>
-              <a:t>Reuse concept diagram multi-tenancy-workload-security-...-01-identity-flow.svg — IdP → User → Group (highlighted) → RoleBinding → Role → verbs.</a:t>
-            </a:r>
-          </a:p>
-        </p:txBody>
-      </p:sp>
       <p:cxnSp>
         <p:nvCxnSpPr>
-          <p:cNvPr id="26" name="Connector 25"/>
+          <p:cNvPr id="23" name="Connector 22"/>
           <p:cNvCxnSpPr/>
           <p:nvPr/>
         </p:nvCxnSpPr>
@@ -6287,7 +6610,7 @@
       </p:cxnSp>
       <p:sp>
         <p:nvSpPr>
-          <p:cNvPr id="27" name="TextBox 26"/>
+          <p:cNvPr id="24" name="TextBox 23"/>
           <p:cNvSpPr txBox="1"/>
           <p:nvPr/>
         </p:nvSpPr>
@@ -6332,7 +6655,7 @@
       </p:sp>
       <p:sp>
         <p:nvSpPr>
-          <p:cNvPr id="28" name="TextBox 27"/>
+          <p:cNvPr id="25" name="TextBox 24"/>
           <p:cNvSpPr txBox="1"/>
           <p:nvPr/>
         </p:nvSpPr>
@@ -6552,11 +6875,11 @@
         <p:spPr>
           <a:xfrm>
             <a:off x="841248" y="2395728"/>
-            <a:ext cx="5715000" cy="530352"/>
+            <a:ext cx="5138928" cy="786384"/>
           </a:xfrm>
           <a:prstGeom prst="roundRect">
             <a:avLst>
-              <a:gd name="adj" fmla="val 6000"/>
+              <a:gd name="adj" fmla="val 7000"/>
             </a:avLst>
           </a:prstGeom>
           <a:solidFill>
@@ -6591,9 +6914,55 @@
           </a:p>
         </p:txBody>
       </p:sp>
+      <p:sp>
+        <p:nvSpPr>
+          <p:cNvPr id="7" name="Rounded Rectangle 6"/>
+          <p:cNvSpPr/>
+          <p:nvPr/>
+        </p:nvSpPr>
+        <p:spPr>
+          <a:xfrm>
+            <a:off x="987552" y="2532888"/>
+            <a:ext cx="512064" cy="512064"/>
+          </a:xfrm>
+          <a:prstGeom prst="roundRect">
+            <a:avLst>
+              <a:gd name="adj" fmla="val 26000"/>
+            </a:avLst>
+          </a:prstGeom>
+          <a:solidFill>
+            <a:srgbClr val="EE0000"/>
+          </a:solidFill>
+          <a:ln>
+            <a:noFill/>
+          </a:ln>
+          <a:effectLst/>
+        </p:spPr>
+        <p:style>
+          <a:lnRef idx="1">
+            <a:schemeClr val="accent1"/>
+          </a:lnRef>
+          <a:fillRef idx="3">
+            <a:schemeClr val="accent1"/>
+          </a:fillRef>
+          <a:effectRef idx="2">
+            <a:schemeClr val="accent1"/>
+          </a:effectRef>
+          <a:fontRef idx="minor">
+            <a:schemeClr val="lt1"/>
+          </a:fontRef>
+        </p:style>
+        <p:txBody>
+          <a:bodyPr rtlCol="0" anchor="ctr"/>
+          <a:lstStyle/>
+          <a:p>
+            <a:pPr algn="ctr"/>
+          </a:p>
+        </p:txBody>
+      </p:sp>
       <p:pic>
         <p:nvPicPr>
-          <p:cNvPr id="7" name="Picture 6" descr="check_steel.png"/>
+          <p:cNvPr id="8" name="Picture 7" descr="check_white.png"/>
           <p:cNvPicPr>
             <a:picLocks noChangeAspect="1"/>
           </p:cNvPicPr>
@@ -6607,8 +6976,8 @@
         </p:blipFill>
         <p:spPr>
           <a:xfrm>
-            <a:off x="987552" y="2542032"/>
-            <a:ext cx="237744" cy="237744"/>
+            <a:off x="1110447" y="2655783"/>
+            <a:ext cx="266273" cy="266273"/>
           </a:xfrm>
           <a:prstGeom prst="rect">
             <a:avLst/>
@@ -6617,14 +6986,14 @@
       </p:pic>
       <p:sp>
         <p:nvSpPr>
-          <p:cNvPr id="8" name="TextBox 7"/>
+          <p:cNvPr id="9" name="TextBox 8"/>
           <p:cNvSpPr txBox="1"/>
           <p:nvPr/>
         </p:nvSpPr>
         <p:spPr>
           <a:xfrm>
-            <a:off x="1353312" y="2395728"/>
-            <a:ext cx="5029200" cy="530352"/>
+            <a:off x="1627632" y="2395728"/>
+            <a:ext cx="4206240" cy="786384"/>
           </a:xfrm>
           <a:prstGeom prst="rect">
             <a:avLst/>
@@ -6649,7 +7018,7 @@
               </a:spcAft>
             </a:pPr>
             <a:r>
-              <a:rPr sz="1200" b="0">
+              <a:rPr sz="1150" b="0">
                 <a:solidFill>
                   <a:srgbClr val="1A1A1A"/>
                 </a:solidFill>
@@ -6662,18 +7031,18 @@
       </p:sp>
       <p:sp>
         <p:nvSpPr>
-          <p:cNvPr id="9" name="Rounded Rectangle 8"/>
+          <p:cNvPr id="10" name="Rounded Rectangle 9"/>
           <p:cNvSpPr/>
           <p:nvPr/>
         </p:nvSpPr>
         <p:spPr>
           <a:xfrm>
-            <a:off x="841248" y="2999232"/>
-            <a:ext cx="5715000" cy="530352"/>
+            <a:off x="6254496" y="2395728"/>
+            <a:ext cx="5138928" cy="786384"/>
           </a:xfrm>
           <a:prstGeom prst="roundRect">
             <a:avLst>
-              <a:gd name="adj" fmla="val 6000"/>
+              <a:gd name="adj" fmla="val 7000"/>
             </a:avLst>
           </a:prstGeom>
           <a:solidFill>
@@ -6708,9 +7077,55 @@
           </a:p>
         </p:txBody>
       </p:sp>
+      <p:sp>
+        <p:nvSpPr>
+          <p:cNvPr id="11" name="Rounded Rectangle 10"/>
+          <p:cNvSpPr/>
+          <p:nvPr/>
+        </p:nvSpPr>
+        <p:spPr>
+          <a:xfrm>
+            <a:off x="6400800" y="2532888"/>
+            <a:ext cx="512064" cy="512064"/>
+          </a:xfrm>
+          <a:prstGeom prst="roundRect">
+            <a:avLst>
+              <a:gd name="adj" fmla="val 26000"/>
+            </a:avLst>
+          </a:prstGeom>
+          <a:solidFill>
+            <a:srgbClr val="EE0000"/>
+          </a:solidFill>
+          <a:ln>
+            <a:noFill/>
+          </a:ln>
+          <a:effectLst/>
+        </p:spPr>
+        <p:style>
+          <a:lnRef idx="1">
+            <a:schemeClr val="accent1"/>
+          </a:lnRef>
+          <a:fillRef idx="3">
+            <a:schemeClr val="accent1"/>
+          </a:fillRef>
+          <a:effectRef idx="2">
+            <a:schemeClr val="accent1"/>
+          </a:effectRef>
+          <a:fontRef idx="minor">
+            <a:schemeClr val="lt1"/>
+          </a:fontRef>
+        </p:style>
+        <p:txBody>
+          <a:bodyPr rtlCol="0" anchor="ctr"/>
+          <a:lstStyle/>
+          <a:p>
+            <a:pPr algn="ctr"/>
+          </a:p>
+        </p:txBody>
+      </p:sp>
       <p:pic>
         <p:nvPicPr>
-          <p:cNvPr id="10" name="Picture 9" descr="check_steel.png"/>
+          <p:cNvPr id="12" name="Picture 11" descr="check_white.png"/>
           <p:cNvPicPr>
             <a:picLocks noChangeAspect="1"/>
           </p:cNvPicPr>
@@ -6724,8 +7139,8 @@
         </p:blipFill>
         <p:spPr>
           <a:xfrm>
-            <a:off x="987552" y="3145536"/>
-            <a:ext cx="237744" cy="237744"/>
+            <a:off x="6523695" y="2655783"/>
+            <a:ext cx="266273" cy="266273"/>
           </a:xfrm>
           <a:prstGeom prst="rect">
             <a:avLst/>
@@ -6734,14 +7149,14 @@
       </p:pic>
       <p:sp>
         <p:nvSpPr>
-          <p:cNvPr id="11" name="TextBox 10"/>
+          <p:cNvPr id="13" name="TextBox 12"/>
           <p:cNvSpPr txBox="1"/>
           <p:nvPr/>
         </p:nvSpPr>
         <p:spPr>
           <a:xfrm>
-            <a:off x="1353312" y="2999232"/>
-            <a:ext cx="5029200" cy="530352"/>
+            <a:off x="7040880" y="2395728"/>
+            <a:ext cx="4206240" cy="786384"/>
           </a:xfrm>
           <a:prstGeom prst="rect">
             <a:avLst/>
@@ -6766,7 +7181,7 @@
               </a:spcAft>
             </a:pPr>
             <a:r>
-              <a:rPr sz="1200" b="0">
+              <a:rPr sz="1150" b="0">
                 <a:solidFill>
                   <a:srgbClr val="1A1A1A"/>
                 </a:solidFill>
@@ -6779,18 +7194,18 @@
       </p:sp>
       <p:sp>
         <p:nvSpPr>
-          <p:cNvPr id="12" name="Rounded Rectangle 11"/>
+          <p:cNvPr id="14" name="Rounded Rectangle 13"/>
           <p:cNvSpPr/>
           <p:nvPr/>
         </p:nvSpPr>
         <p:spPr>
           <a:xfrm>
-            <a:off x="841248" y="3602736"/>
-            <a:ext cx="5715000" cy="530352"/>
+            <a:off x="841248" y="3328416"/>
+            <a:ext cx="5138928" cy="786384"/>
           </a:xfrm>
           <a:prstGeom prst="roundRect">
             <a:avLst>
-              <a:gd name="adj" fmla="val 6000"/>
+              <a:gd name="adj" fmla="val 7000"/>
             </a:avLst>
           </a:prstGeom>
           <a:solidFill>
@@ -6825,9 +7240,55 @@
           </a:p>
         </p:txBody>
       </p:sp>
+      <p:sp>
+        <p:nvSpPr>
+          <p:cNvPr id="15" name="Rounded Rectangle 14"/>
+          <p:cNvSpPr/>
+          <p:nvPr/>
+        </p:nvSpPr>
+        <p:spPr>
+          <a:xfrm>
+            <a:off x="987552" y="3465576"/>
+            <a:ext cx="512064" cy="512064"/>
+          </a:xfrm>
+          <a:prstGeom prst="roundRect">
+            <a:avLst>
+              <a:gd name="adj" fmla="val 26000"/>
+            </a:avLst>
+          </a:prstGeom>
+          <a:solidFill>
+            <a:srgbClr val="EE0000"/>
+          </a:solidFill>
+          <a:ln>
+            <a:noFill/>
+          </a:ln>
+          <a:effectLst/>
+        </p:spPr>
+        <p:style>
+          <a:lnRef idx="1">
+            <a:schemeClr val="accent1"/>
+          </a:lnRef>
+          <a:fillRef idx="3">
+            <a:schemeClr val="accent1"/>
+          </a:fillRef>
+          <a:effectRef idx="2">
+            <a:schemeClr val="accent1"/>
+          </a:effectRef>
+          <a:fontRef idx="minor">
+            <a:schemeClr val="lt1"/>
+          </a:fontRef>
+        </p:style>
+        <p:txBody>
+          <a:bodyPr rtlCol="0" anchor="ctr"/>
+          <a:lstStyle/>
+          <a:p>
+            <a:pPr algn="ctr"/>
+          </a:p>
+        </p:txBody>
+      </p:sp>
       <p:pic>
         <p:nvPicPr>
-          <p:cNvPr id="13" name="Picture 12" descr="check_steel.png"/>
+          <p:cNvPr id="16" name="Picture 15" descr="check_white.png"/>
           <p:cNvPicPr>
             <a:picLocks noChangeAspect="1"/>
           </p:cNvPicPr>
@@ -6841,8 +7302,8 @@
         </p:blipFill>
         <p:spPr>
           <a:xfrm>
-            <a:off x="987552" y="3749040"/>
-            <a:ext cx="237744" cy="237744"/>
+            <a:off x="1110447" y="3588471"/>
+            <a:ext cx="266273" cy="266273"/>
           </a:xfrm>
           <a:prstGeom prst="rect">
             <a:avLst/>
@@ -6851,14 +7312,14 @@
       </p:pic>
       <p:sp>
         <p:nvSpPr>
-          <p:cNvPr id="14" name="TextBox 13"/>
+          <p:cNvPr id="17" name="TextBox 16"/>
           <p:cNvSpPr txBox="1"/>
           <p:nvPr/>
         </p:nvSpPr>
         <p:spPr>
           <a:xfrm>
-            <a:off x="1353312" y="3602736"/>
-            <a:ext cx="5029200" cy="530352"/>
+            <a:off x="1627632" y="3328416"/>
+            <a:ext cx="4206240" cy="786384"/>
           </a:xfrm>
           <a:prstGeom prst="rect">
             <a:avLst/>
@@ -6883,7 +7344,7 @@
               </a:spcAft>
             </a:pPr>
             <a:r>
-              <a:rPr sz="1200" b="0">
+              <a:rPr sz="1150" b="0">
                 <a:solidFill>
                   <a:srgbClr val="1A1A1A"/>
                 </a:solidFill>
@@ -6896,18 +7357,18 @@
       </p:sp>
       <p:sp>
         <p:nvSpPr>
-          <p:cNvPr id="15" name="Rounded Rectangle 14"/>
+          <p:cNvPr id="18" name="Rounded Rectangle 17"/>
           <p:cNvSpPr/>
           <p:nvPr/>
         </p:nvSpPr>
         <p:spPr>
           <a:xfrm>
-            <a:off x="841248" y="4206240"/>
-            <a:ext cx="5715000" cy="530352"/>
+            <a:off x="6254496" y="3328416"/>
+            <a:ext cx="5138928" cy="786384"/>
           </a:xfrm>
           <a:prstGeom prst="roundRect">
             <a:avLst>
-              <a:gd name="adj" fmla="val 6000"/>
+              <a:gd name="adj" fmla="val 7000"/>
             </a:avLst>
           </a:prstGeom>
           <a:solidFill>
@@ -6942,9 +7403,55 @@
           </a:p>
         </p:txBody>
       </p:sp>
+      <p:sp>
+        <p:nvSpPr>
+          <p:cNvPr id="19" name="Rounded Rectangle 18"/>
+          <p:cNvSpPr/>
+          <p:nvPr/>
+        </p:nvSpPr>
+        <p:spPr>
+          <a:xfrm>
+            <a:off x="6400800" y="3465576"/>
+            <a:ext cx="512064" cy="512064"/>
+          </a:xfrm>
+          <a:prstGeom prst="roundRect">
+            <a:avLst>
+              <a:gd name="adj" fmla="val 26000"/>
+            </a:avLst>
+          </a:prstGeom>
+          <a:solidFill>
+            <a:srgbClr val="EE0000"/>
+          </a:solidFill>
+          <a:ln>
+            <a:noFill/>
+          </a:ln>
+          <a:effectLst/>
+        </p:spPr>
+        <p:style>
+          <a:lnRef idx="1">
+            <a:schemeClr val="accent1"/>
+          </a:lnRef>
+          <a:fillRef idx="3">
+            <a:schemeClr val="accent1"/>
+          </a:fillRef>
+          <a:effectRef idx="2">
+            <a:schemeClr val="accent1"/>
+          </a:effectRef>
+          <a:fontRef idx="minor">
+            <a:schemeClr val="lt1"/>
+          </a:fontRef>
+        </p:style>
+        <p:txBody>
+          <a:bodyPr rtlCol="0" anchor="ctr"/>
+          <a:lstStyle/>
+          <a:p>
+            <a:pPr algn="ctr"/>
+          </a:p>
+        </p:txBody>
+      </p:sp>
       <p:pic>
         <p:nvPicPr>
-          <p:cNvPr id="16" name="Picture 15" descr="check_steel.png"/>
+          <p:cNvPr id="20" name="Picture 19" descr="check_white.png"/>
           <p:cNvPicPr>
             <a:picLocks noChangeAspect="1"/>
           </p:cNvPicPr>
@@ -6958,8 +7465,8 @@
         </p:blipFill>
         <p:spPr>
           <a:xfrm>
-            <a:off x="987552" y="4352544"/>
-            <a:ext cx="237744" cy="237744"/>
+            <a:off x="6523695" y="3588471"/>
+            <a:ext cx="266273" cy="266273"/>
           </a:xfrm>
           <a:prstGeom prst="rect">
             <a:avLst/>
@@ -6968,14 +7475,14 @@
       </p:pic>
       <p:sp>
         <p:nvSpPr>
-          <p:cNvPr id="17" name="TextBox 16"/>
+          <p:cNvPr id="21" name="TextBox 20"/>
           <p:cNvSpPr txBox="1"/>
           <p:nvPr/>
         </p:nvSpPr>
         <p:spPr>
           <a:xfrm>
-            <a:off x="1353312" y="4206240"/>
-            <a:ext cx="5029200" cy="530352"/>
+            <a:off x="7040880" y="3328416"/>
+            <a:ext cx="4206240" cy="786384"/>
           </a:xfrm>
           <a:prstGeom prst="rect">
             <a:avLst/>
@@ -7000,7 +7507,7 @@
               </a:spcAft>
             </a:pPr>
             <a:r>
-              <a:rPr sz="1200" b="0">
+              <a:rPr sz="1150" b="0">
                 <a:solidFill>
                   <a:srgbClr val="1A1A1A"/>
                 </a:solidFill>
@@ -7013,18 +7520,18 @@
       </p:sp>
       <p:sp>
         <p:nvSpPr>
-          <p:cNvPr id="18" name="Rounded Rectangle 17"/>
+          <p:cNvPr id="22" name="Rounded Rectangle 21"/>
           <p:cNvSpPr/>
           <p:nvPr/>
         </p:nvSpPr>
         <p:spPr>
           <a:xfrm>
-            <a:off x="841248" y="4809744"/>
-            <a:ext cx="5715000" cy="530352"/>
+            <a:off x="841248" y="4261104"/>
+            <a:ext cx="5138928" cy="786384"/>
           </a:xfrm>
           <a:prstGeom prst="roundRect">
             <a:avLst>
-              <a:gd name="adj" fmla="val 6000"/>
+              <a:gd name="adj" fmla="val 7000"/>
             </a:avLst>
           </a:prstGeom>
           <a:solidFill>
@@ -7059,9 +7566,55 @@
           </a:p>
         </p:txBody>
       </p:sp>
+      <p:sp>
+        <p:nvSpPr>
+          <p:cNvPr id="23" name="Rounded Rectangle 22"/>
+          <p:cNvSpPr/>
+          <p:nvPr/>
+        </p:nvSpPr>
+        <p:spPr>
+          <a:xfrm>
+            <a:off x="987552" y="4398264"/>
+            <a:ext cx="512064" cy="512064"/>
+          </a:xfrm>
+          <a:prstGeom prst="roundRect">
+            <a:avLst>
+              <a:gd name="adj" fmla="val 26000"/>
+            </a:avLst>
+          </a:prstGeom>
+          <a:solidFill>
+            <a:srgbClr val="EE0000"/>
+          </a:solidFill>
+          <a:ln>
+            <a:noFill/>
+          </a:ln>
+          <a:effectLst/>
+        </p:spPr>
+        <p:style>
+          <a:lnRef idx="1">
+            <a:schemeClr val="accent1"/>
+          </a:lnRef>
+          <a:fillRef idx="3">
+            <a:schemeClr val="accent1"/>
+          </a:fillRef>
+          <a:effectRef idx="2">
+            <a:schemeClr val="accent1"/>
+          </a:effectRef>
+          <a:fontRef idx="minor">
+            <a:schemeClr val="lt1"/>
+          </a:fontRef>
+        </p:style>
+        <p:txBody>
+          <a:bodyPr rtlCol="0" anchor="ctr"/>
+          <a:lstStyle/>
+          <a:p>
+            <a:pPr algn="ctr"/>
+          </a:p>
+        </p:txBody>
+      </p:sp>
       <p:pic>
         <p:nvPicPr>
-          <p:cNvPr id="19" name="Picture 18" descr="check_steel.png"/>
+          <p:cNvPr id="24" name="Picture 23" descr="check_white.png"/>
           <p:cNvPicPr>
             <a:picLocks noChangeAspect="1"/>
           </p:cNvPicPr>
@@ -7075,8 +7628,8 @@
         </p:blipFill>
         <p:spPr>
           <a:xfrm>
-            <a:off x="987552" y="4956048"/>
-            <a:ext cx="237744" cy="237744"/>
+            <a:off x="1110447" y="4521159"/>
+            <a:ext cx="266273" cy="266273"/>
           </a:xfrm>
           <a:prstGeom prst="rect">
             <a:avLst/>
@@ -7085,14 +7638,14 @@
       </p:pic>
       <p:sp>
         <p:nvSpPr>
-          <p:cNvPr id="20" name="TextBox 19"/>
+          <p:cNvPr id="25" name="TextBox 24"/>
           <p:cNvSpPr txBox="1"/>
           <p:nvPr/>
         </p:nvSpPr>
         <p:spPr>
           <a:xfrm>
-            <a:off x="1353312" y="4809744"/>
-            <a:ext cx="5029200" cy="530352"/>
+            <a:off x="1627632" y="4261104"/>
+            <a:ext cx="4206240" cy="786384"/>
           </a:xfrm>
           <a:prstGeom prst="rect">
             <a:avLst/>
@@ -7117,221 +7670,13 @@
               </a:spcAft>
             </a:pPr>
             <a:r>
-              <a:rPr sz="1200" b="0">
+              <a:rPr sz="1150" b="0">
                 <a:solidFill>
                   <a:srgbClr val="1A1A1A"/>
                 </a:solidFill>
                 <a:latin typeface="Red Hat Text"/>
               </a:rPr>
               <a:t>Escalation rule: can't grant what you lack</a:t>
-            </a:r>
-          </a:p>
-        </p:txBody>
-      </p:sp>
-      <p:sp>
-        <p:nvSpPr>
-          <p:cNvPr id="21" name="Rounded Rectangle 20"/>
-          <p:cNvSpPr/>
-          <p:nvPr/>
-        </p:nvSpPr>
-        <p:spPr>
-          <a:xfrm>
-            <a:off x="6812280" y="2395728"/>
-            <a:ext cx="4538167" cy="2944368"/>
-          </a:xfrm>
-          <a:prstGeom prst="roundRect">
-            <a:avLst>
-              <a:gd name="adj" fmla="val 4000"/>
-            </a:avLst>
-          </a:prstGeom>
-          <a:solidFill>
-            <a:srgbClr val="FFFFFF"/>
-          </a:solidFill>
-          <a:ln w="15240">
-            <a:solidFill>
-              <a:srgbClr val="DDE1E6"/>
-            </a:solidFill>
-          </a:ln>
-          <a:effectLst/>
-        </p:spPr>
-        <p:style>
-          <a:lnRef idx="1">
-            <a:schemeClr val="accent1"/>
-          </a:lnRef>
-          <a:fillRef idx="3">
-            <a:schemeClr val="accent1"/>
-          </a:fillRef>
-          <a:effectRef idx="2">
-            <a:schemeClr val="accent1"/>
-          </a:effectRef>
-          <a:fontRef idx="minor">
-            <a:schemeClr val="lt1"/>
-          </a:fontRef>
-        </p:style>
-        <p:txBody>
-          <a:bodyPr rtlCol="0" anchor="ctr"/>
-          <a:lstStyle/>
-          <a:p>
-            <a:pPr algn="ctr"/>
-          </a:p>
-        </p:txBody>
-      </p:sp>
-      <p:sp>
-        <p:nvSpPr>
-          <p:cNvPr id="22" name="Rounded Rectangle 21"/>
-          <p:cNvSpPr/>
-          <p:nvPr/>
-        </p:nvSpPr>
-        <p:spPr>
-          <a:xfrm>
-            <a:off x="7013448" y="2596896"/>
-            <a:ext cx="1298448" cy="310896"/>
-          </a:xfrm>
-          <a:prstGeom prst="roundRect">
-            <a:avLst>
-              <a:gd name="adj" fmla="val 50000"/>
-            </a:avLst>
-          </a:prstGeom>
-          <a:solidFill>
-            <a:srgbClr val="FCECEC"/>
-          </a:solidFill>
-          <a:ln>
-            <a:noFill/>
-          </a:ln>
-          <a:effectLst/>
-        </p:spPr>
-        <p:style>
-          <a:lnRef idx="1">
-            <a:schemeClr val="accent1"/>
-          </a:lnRef>
-          <a:fillRef idx="3">
-            <a:schemeClr val="accent1"/>
-          </a:fillRef>
-          <a:effectRef idx="2">
-            <a:schemeClr val="accent1"/>
-          </a:effectRef>
-          <a:fontRef idx="minor">
-            <a:schemeClr val="lt1"/>
-          </a:fontRef>
-        </p:style>
-        <p:txBody>
-          <a:bodyPr rtlCol="0" anchor="ctr"/>
-          <a:lstStyle/>
-          <a:p>
-            <a:pPr algn="ctr"/>
-          </a:p>
-        </p:txBody>
-      </p:sp>
-      <p:sp>
-        <p:nvSpPr>
-          <p:cNvPr id="23" name="TextBox 22"/>
-          <p:cNvSpPr txBox="1"/>
-          <p:nvPr/>
-        </p:nvSpPr>
-        <p:spPr>
-          <a:xfrm>
-            <a:off x="7013448" y="2596896"/>
-            <a:ext cx="1298448" cy="310896"/>
-          </a:xfrm>
-          <a:prstGeom prst="rect">
-            <a:avLst/>
-          </a:prstGeom>
-          <a:noFill/>
-        </p:spPr>
-        <p:txBody>
-          <a:bodyPr wrap="none" anchor="ctr" lIns="0" rIns="0" tIns="0" bIns="0">
-            <a:spAutoFit/>
-          </a:bodyPr>
-          <a:lstStyle/>
-          <a:p>
-            <a:pPr algn="ctr">
-              <a:lnSpc>
-                <a:spcPct val="106000"/>
-              </a:lnSpc>
-              <a:spcBef>
-                <a:spcPts val="0"/>
-              </a:spcBef>
-              <a:spcAft>
-                <a:spcPts val="0"/>
-              </a:spcAft>
-            </a:pPr>
-            <a:r>
-              <a:rPr sz="850" b="1">
-                <a:solidFill>
-                  <a:srgbClr val="B80000"/>
-                </a:solidFill>
-                <a:latin typeface="Red Hat Display"/>
-              </a:rPr>
-              <a:t>MEDIA PASS</a:t>
-            </a:r>
-          </a:p>
-        </p:txBody>
-      </p:sp>
-      <p:pic>
-        <p:nvPicPr>
-          <p:cNvPr id="24" name="Picture 23" descr="eye_slate.png"/>
-          <p:cNvPicPr>
-            <a:picLocks noChangeAspect="1"/>
-          </p:cNvPicPr>
-          <p:nvPr/>
-        </p:nvPicPr>
-        <p:blipFill>
-          <a:blip r:embed="rId4"/>
-          <a:stretch>
-            <a:fillRect/>
-          </a:stretch>
-        </p:blipFill>
-        <p:spPr>
-          <a:xfrm>
-            <a:off x="8843619" y="3108960"/>
-            <a:ext cx="475488" cy="475488"/>
-          </a:xfrm>
-          <a:prstGeom prst="rect">
-            <a:avLst/>
-          </a:prstGeom>
-        </p:spPr>
-      </p:pic>
-      <p:sp>
-        <p:nvSpPr>
-          <p:cNvPr id="25" name="TextBox 24"/>
-          <p:cNvSpPr txBox="1"/>
-          <p:nvPr/>
-        </p:nvSpPr>
-        <p:spPr>
-          <a:xfrm>
-            <a:off x="7050024" y="3721608"/>
-            <a:ext cx="4062679" cy="1481328"/>
-          </a:xfrm>
-          <a:prstGeom prst="rect">
-            <a:avLst/>
-          </a:prstGeom>
-          <a:noFill/>
-        </p:spPr>
-        <p:txBody>
-          <a:bodyPr wrap="square" anchor="t" lIns="0" rIns="0" tIns="0" bIns="0">
-            <a:spAutoFit/>
-          </a:bodyPr>
-          <a:lstStyle/>
-          <a:p>
-            <a:pPr algn="l">
-              <a:lnSpc>
-                <a:spcPct val="120000"/>
-              </a:lnSpc>
-              <a:spcBef>
-                <a:spcPts val="0"/>
-              </a:spcBef>
-              <a:spcAft>
-                <a:spcPts val="0"/>
-              </a:spcAft>
-            </a:pPr>
-            <a:r>
-              <a:rPr sz="950" b="0">
-                <a:solidFill>
-                  <a:srgbClr val="8A9099"/>
-                </a:solidFill>
-                <a:latin typeface="Red Hat Text"/>
-              </a:rPr>
-              <a:t>Three concentric role rings (view ⊂ edit ⊂ admin) with a hard wall labelled "quota + SCC = platform-owned" outside admin.</a:t>
             </a:r>
           </a:p>
         </p:txBody>
@@ -7639,7 +7984,7 @@
         <p:spPr>
           <a:xfrm>
             <a:off x="841248" y="2395728"/>
-            <a:ext cx="5715000" cy="530352"/>
+            <a:ext cx="4160520" cy="475488"/>
           </a:xfrm>
           <a:prstGeom prst="roundRect">
             <a:avLst>
@@ -7694,8 +8039,8 @@
         </p:blipFill>
         <p:spPr>
           <a:xfrm>
-            <a:off x="987552" y="2542032"/>
-            <a:ext cx="237744" cy="237744"/>
+            <a:off x="969264" y="2532888"/>
+            <a:ext cx="201168" cy="201168"/>
           </a:xfrm>
           <a:prstGeom prst="rect">
             <a:avLst/>
@@ -7710,8 +8055,8 @@
         </p:nvSpPr>
         <p:spPr>
           <a:xfrm>
-            <a:off x="1353312" y="2395728"/>
-            <a:ext cx="5029200" cy="530352"/>
+            <a:off x="1280160" y="2395728"/>
+            <a:ext cx="3593591" cy="475488"/>
           </a:xfrm>
           <a:prstGeom prst="rect">
             <a:avLst/>
@@ -7736,7 +8081,7 @@
               </a:spcAft>
             </a:pPr>
             <a:r>
-              <a:rPr sz="1200" b="0">
+              <a:rPr sz="1050" b="0">
                 <a:solidFill>
                   <a:srgbClr val="1A1A1A"/>
                 </a:solidFill>
@@ -7755,8 +8100,8 @@
         </p:nvSpPr>
         <p:spPr>
           <a:xfrm>
-            <a:off x="841248" y="2999232"/>
-            <a:ext cx="5715000" cy="530352"/>
+            <a:off x="841248" y="2944368"/>
+            <a:ext cx="4160520" cy="475488"/>
           </a:xfrm>
           <a:prstGeom prst="roundRect">
             <a:avLst>
@@ -7811,8 +8156,8 @@
         </p:blipFill>
         <p:spPr>
           <a:xfrm>
-            <a:off x="987552" y="3145536"/>
-            <a:ext cx="237744" cy="237744"/>
+            <a:off x="969264" y="3081528"/>
+            <a:ext cx="201168" cy="201168"/>
           </a:xfrm>
           <a:prstGeom prst="rect">
             <a:avLst/>
@@ -7827,8 +8172,8 @@
         </p:nvSpPr>
         <p:spPr>
           <a:xfrm>
-            <a:off x="1353312" y="2999232"/>
-            <a:ext cx="5029200" cy="530352"/>
+            <a:off x="1280160" y="2944368"/>
+            <a:ext cx="3593591" cy="475488"/>
           </a:xfrm>
           <a:prstGeom prst="rect">
             <a:avLst/>
@@ -7853,7 +8198,7 @@
               </a:spcAft>
             </a:pPr>
             <a:r>
-              <a:rPr sz="1200" b="0">
+              <a:rPr sz="1050" b="0">
                 <a:solidFill>
                   <a:srgbClr val="1A1A1A"/>
                 </a:solidFill>
@@ -7872,8 +8217,8 @@
         </p:nvSpPr>
         <p:spPr>
           <a:xfrm>
-            <a:off x="841248" y="3602736"/>
-            <a:ext cx="5715000" cy="530352"/>
+            <a:off x="841248" y="3493008"/>
+            <a:ext cx="4160520" cy="475488"/>
           </a:xfrm>
           <a:prstGeom prst="roundRect">
             <a:avLst>
@@ -7928,8 +8273,8 @@
         </p:blipFill>
         <p:spPr>
           <a:xfrm>
-            <a:off x="987552" y="3749040"/>
-            <a:ext cx="237744" cy="237744"/>
+            <a:off x="969264" y="3630168"/>
+            <a:ext cx="201168" cy="201168"/>
           </a:xfrm>
           <a:prstGeom prst="rect">
             <a:avLst/>
@@ -7944,8 +8289,8 @@
         </p:nvSpPr>
         <p:spPr>
           <a:xfrm>
-            <a:off x="1353312" y="3602736"/>
-            <a:ext cx="5029200" cy="530352"/>
+            <a:off x="1280160" y="3493008"/>
+            <a:ext cx="3593591" cy="475488"/>
           </a:xfrm>
           <a:prstGeom prst="rect">
             <a:avLst/>
@@ -7970,7 +8315,7 @@
               </a:spcAft>
             </a:pPr>
             <a:r>
-              <a:rPr sz="1200" b="0">
+              <a:rPr sz="1050" b="0">
                 <a:solidFill>
                   <a:srgbClr val="1A1A1A"/>
                 </a:solidFill>
@@ -7989,8 +8334,8 @@
         </p:nvSpPr>
         <p:spPr>
           <a:xfrm>
-            <a:off x="841248" y="4206240"/>
-            <a:ext cx="5715000" cy="530352"/>
+            <a:off x="841248" y="4041648"/>
+            <a:ext cx="4160520" cy="475488"/>
           </a:xfrm>
           <a:prstGeom prst="roundRect">
             <a:avLst>
@@ -8045,8 +8390,8 @@
         </p:blipFill>
         <p:spPr>
           <a:xfrm>
-            <a:off x="987552" y="4352544"/>
-            <a:ext cx="237744" cy="237744"/>
+            <a:off x="969264" y="4178807"/>
+            <a:ext cx="201168" cy="201168"/>
           </a:xfrm>
           <a:prstGeom prst="rect">
             <a:avLst/>
@@ -8061,8 +8406,8 @@
         </p:nvSpPr>
         <p:spPr>
           <a:xfrm>
-            <a:off x="1353312" y="4206240"/>
-            <a:ext cx="5029200" cy="530352"/>
+            <a:off x="1280160" y="4041648"/>
+            <a:ext cx="3593591" cy="475488"/>
           </a:xfrm>
           <a:prstGeom prst="rect">
             <a:avLst/>
@@ -8087,7 +8432,7 @@
               </a:spcAft>
             </a:pPr>
             <a:r>
-              <a:rPr sz="1200" b="0">
+              <a:rPr sz="1050" b="0">
                 <a:solidFill>
                   <a:srgbClr val="1A1A1A"/>
                 </a:solidFill>
@@ -8106,8 +8451,8 @@
         </p:nvSpPr>
         <p:spPr>
           <a:xfrm>
-            <a:off x="841248" y="4809744"/>
-            <a:ext cx="5715000" cy="530352"/>
+            <a:off x="841248" y="4590288"/>
+            <a:ext cx="4160520" cy="475488"/>
           </a:xfrm>
           <a:prstGeom prst="roundRect">
             <a:avLst>
@@ -8162,8 +8507,8 @@
         </p:blipFill>
         <p:spPr>
           <a:xfrm>
-            <a:off x="987552" y="4956048"/>
-            <a:ext cx="237744" cy="237744"/>
+            <a:off x="969264" y="4727447"/>
+            <a:ext cx="201168" cy="201168"/>
           </a:xfrm>
           <a:prstGeom prst="rect">
             <a:avLst/>
@@ -8178,8 +8523,8 @@
         </p:nvSpPr>
         <p:spPr>
           <a:xfrm>
-            <a:off x="1353312" y="4809744"/>
-            <a:ext cx="5029200" cy="530352"/>
+            <a:off x="1280160" y="4590288"/>
+            <a:ext cx="3593591" cy="475488"/>
           </a:xfrm>
           <a:prstGeom prst="rect">
             <a:avLst/>
@@ -8204,7 +8549,7 @@
               </a:spcAft>
             </a:pPr>
             <a:r>
-              <a:rPr sz="1200" b="0">
+              <a:rPr sz="1050" b="0">
                 <a:solidFill>
                   <a:srgbClr val="1A1A1A"/>
                 </a:solidFill>
@@ -8223,8 +8568,8 @@
         </p:nvSpPr>
         <p:spPr>
           <a:xfrm>
-            <a:off x="6812280" y="2395728"/>
-            <a:ext cx="4538167" cy="2944368"/>
+            <a:off x="5385816" y="2395728"/>
+            <a:ext cx="4242708" cy="3657600"/>
           </a:xfrm>
           <a:prstGeom prst="roundRect">
             <a:avLst>
@@ -8263,100 +8608,9 @@
           </a:p>
         </p:txBody>
       </p:sp>
-      <p:sp>
-        <p:nvSpPr>
-          <p:cNvPr id="22" name="Rounded Rectangle 21"/>
-          <p:cNvSpPr/>
-          <p:nvPr/>
-        </p:nvSpPr>
-        <p:spPr>
-          <a:xfrm>
-            <a:off x="7013448" y="2596896"/>
-            <a:ext cx="1298448" cy="310896"/>
-          </a:xfrm>
-          <a:prstGeom prst="roundRect">
-            <a:avLst>
-              <a:gd name="adj" fmla="val 50000"/>
-            </a:avLst>
-          </a:prstGeom>
-          <a:solidFill>
-            <a:srgbClr val="FCECEC"/>
-          </a:solidFill>
-          <a:ln>
-            <a:noFill/>
-          </a:ln>
-          <a:effectLst/>
-        </p:spPr>
-        <p:style>
-          <a:lnRef idx="1">
-            <a:schemeClr val="accent1"/>
-          </a:lnRef>
-          <a:fillRef idx="3">
-            <a:schemeClr val="accent1"/>
-          </a:fillRef>
-          <a:effectRef idx="2">
-            <a:schemeClr val="accent1"/>
-          </a:effectRef>
-          <a:fontRef idx="minor">
-            <a:schemeClr val="lt1"/>
-          </a:fontRef>
-        </p:style>
-        <p:txBody>
-          <a:bodyPr rtlCol="0" anchor="ctr"/>
-          <a:lstStyle/>
-          <a:p>
-            <a:pPr algn="ctr"/>
-          </a:p>
-        </p:txBody>
-      </p:sp>
-      <p:sp>
-        <p:nvSpPr>
-          <p:cNvPr id="23" name="TextBox 22"/>
-          <p:cNvSpPr txBox="1"/>
-          <p:nvPr/>
-        </p:nvSpPr>
-        <p:spPr>
-          <a:xfrm>
-            <a:off x="7013448" y="2596896"/>
-            <a:ext cx="1298448" cy="310896"/>
-          </a:xfrm>
-          <a:prstGeom prst="rect">
-            <a:avLst/>
-          </a:prstGeom>
-          <a:noFill/>
-        </p:spPr>
-        <p:txBody>
-          <a:bodyPr wrap="none" anchor="ctr" lIns="0" rIns="0" tIns="0" bIns="0">
-            <a:spAutoFit/>
-          </a:bodyPr>
-          <a:lstStyle/>
-          <a:p>
-            <a:pPr algn="ctr">
-              <a:lnSpc>
-                <a:spcPct val="106000"/>
-              </a:lnSpc>
-              <a:spcBef>
-                <a:spcPts val="0"/>
-              </a:spcBef>
-              <a:spcAft>
-                <a:spcPts val="0"/>
-              </a:spcAft>
-            </a:pPr>
-            <a:r>
-              <a:rPr sz="850" b="1">
-                <a:solidFill>
-                  <a:srgbClr val="B80000"/>
-                </a:solidFill>
-                <a:latin typeface="Red Hat Display"/>
-              </a:rPr>
-              <a:t>MEDIA PASS</a:t>
-            </a:r>
-          </a:p>
-        </p:txBody>
-      </p:sp>
       <p:pic>
         <p:nvPicPr>
-          <p:cNvPr id="24" name="Picture 23" descr="eye_slate.png"/>
+          <p:cNvPr id="22" name="Picture 21" descr="02-scc-admission.png"/>
           <p:cNvPicPr>
             <a:picLocks noChangeAspect="1"/>
           </p:cNvPicPr>
@@ -8370,62 +8624,17 @@
         </p:blipFill>
         <p:spPr>
           <a:xfrm>
-            <a:off x="8843619" y="3108960"/>
-            <a:ext cx="475488" cy="475488"/>
+            <a:off x="5532120" y="2542032"/>
+            <a:ext cx="3950100" cy="3364992"/>
           </a:xfrm>
           <a:prstGeom prst="rect">
             <a:avLst/>
           </a:prstGeom>
         </p:spPr>
       </p:pic>
-      <p:sp>
-        <p:nvSpPr>
-          <p:cNvPr id="25" name="TextBox 24"/>
-          <p:cNvSpPr txBox="1"/>
-          <p:nvPr/>
-        </p:nvSpPr>
-        <p:spPr>
-          <a:xfrm>
-            <a:off x="7050024" y="3721608"/>
-            <a:ext cx="4062679" cy="1481328"/>
-          </a:xfrm>
-          <a:prstGeom prst="rect">
-            <a:avLst/>
-          </a:prstGeom>
-          <a:noFill/>
-        </p:spPr>
-        <p:txBody>
-          <a:bodyPr wrap="square" anchor="t" lIns="0" rIns="0" tIns="0" bIns="0">
-            <a:spAutoFit/>
-          </a:bodyPr>
-          <a:lstStyle/>
-          <a:p>
-            <a:pPr algn="l">
-              <a:lnSpc>
-                <a:spcPct val="120000"/>
-              </a:lnSpc>
-              <a:spcBef>
-                <a:spcPts val="0"/>
-              </a:spcBef>
-              <a:spcAft>
-                <a:spcPts val="0"/>
-              </a:spcAft>
-            </a:pPr>
-            <a:r>
-              <a:rPr sz="950" b="0">
-                <a:solidFill>
-                  <a:srgbClr val="8A9099"/>
-                </a:solidFill>
-                <a:latin typeface="Red Hat Text"/>
-              </a:rPr>
-              <a:t>Reuse concept diagram multi-tenancy-workload-security-...-02-scc-admission.svg — Pod runAsUser:0 → restricted-v2 gate → rejected / fixed / scoped-grant.</a:t>
-            </a:r>
-          </a:p>
-        </p:txBody>
-      </p:sp>
       <p:cxnSp>
         <p:nvCxnSpPr>
-          <p:cNvPr id="26" name="Connector 25"/>
+          <p:cNvPr id="23" name="Connector 22"/>
           <p:cNvCxnSpPr/>
           <p:nvPr/>
         </p:nvCxnSpPr>
@@ -8461,7 +8670,7 @@
       </p:cxnSp>
       <p:sp>
         <p:nvSpPr>
-          <p:cNvPr id="27" name="TextBox 26"/>
+          <p:cNvPr id="24" name="TextBox 23"/>
           <p:cNvSpPr txBox="1"/>
           <p:nvPr/>
         </p:nvSpPr>
@@ -8506,7 +8715,7 @@
       </p:sp>
       <p:sp>
         <p:nvSpPr>
-          <p:cNvPr id="28" name="TextBox 27"/>
+          <p:cNvPr id="25" name="TextBox 24"/>
           <p:cNvSpPr txBox="1"/>
           <p:nvPr/>
         </p:nvSpPr>
@@ -8771,11 +8980,11 @@
         <p:spPr>
           <a:xfrm>
             <a:off x="841248" y="2670048"/>
-            <a:ext cx="5715000" cy="530352"/>
+            <a:ext cx="5138928" cy="786384"/>
           </a:xfrm>
           <a:prstGeom prst="roundRect">
             <a:avLst>
-              <a:gd name="adj" fmla="val 6000"/>
+              <a:gd name="adj" fmla="val 7000"/>
             </a:avLst>
           </a:prstGeom>
           <a:solidFill>
@@ -8810,9 +9019,55 @@
           </a:p>
         </p:txBody>
       </p:sp>
+      <p:sp>
+        <p:nvSpPr>
+          <p:cNvPr id="8" name="Rounded Rectangle 7"/>
+          <p:cNvSpPr/>
+          <p:nvPr/>
+        </p:nvSpPr>
+        <p:spPr>
+          <a:xfrm>
+            <a:off x="987552" y="2807208"/>
+            <a:ext cx="512064" cy="512064"/>
+          </a:xfrm>
+          <a:prstGeom prst="roundRect">
+            <a:avLst>
+              <a:gd name="adj" fmla="val 26000"/>
+            </a:avLst>
+          </a:prstGeom>
+          <a:solidFill>
+            <a:srgbClr val="EE0000"/>
+          </a:solidFill>
+          <a:ln>
+            <a:noFill/>
+          </a:ln>
+          <a:effectLst/>
+        </p:spPr>
+        <p:style>
+          <a:lnRef idx="1">
+            <a:schemeClr val="accent1"/>
+          </a:lnRef>
+          <a:fillRef idx="3">
+            <a:schemeClr val="accent1"/>
+          </a:fillRef>
+          <a:effectRef idx="2">
+            <a:schemeClr val="accent1"/>
+          </a:effectRef>
+          <a:fontRef idx="minor">
+            <a:schemeClr val="lt1"/>
+          </a:fontRef>
+        </p:style>
+        <p:txBody>
+          <a:bodyPr rtlCol="0" anchor="ctr"/>
+          <a:lstStyle/>
+          <a:p>
+            <a:pPr algn="ctr"/>
+          </a:p>
+        </p:txBody>
+      </p:sp>
       <p:pic>
         <p:nvPicPr>
-          <p:cNvPr id="8" name="Picture 7" descr="check_steel.png"/>
+          <p:cNvPr id="9" name="Picture 8" descr="check_white.png"/>
           <p:cNvPicPr>
             <a:picLocks noChangeAspect="1"/>
           </p:cNvPicPr>
@@ -8826,8 +9081,8 @@
         </p:blipFill>
         <p:spPr>
           <a:xfrm>
-            <a:off x="987552" y="2816352"/>
-            <a:ext cx="237744" cy="237744"/>
+            <a:off x="1110447" y="2930103"/>
+            <a:ext cx="266273" cy="266273"/>
           </a:xfrm>
           <a:prstGeom prst="rect">
             <a:avLst/>
@@ -8836,14 +9091,14 @@
       </p:pic>
       <p:sp>
         <p:nvSpPr>
-          <p:cNvPr id="9" name="TextBox 8"/>
+          <p:cNvPr id="10" name="TextBox 9"/>
           <p:cNvSpPr txBox="1"/>
           <p:nvPr/>
         </p:nvSpPr>
         <p:spPr>
           <a:xfrm>
-            <a:off x="1353312" y="2670048"/>
-            <a:ext cx="5029200" cy="530352"/>
+            <a:off x="1627632" y="2670048"/>
+            <a:ext cx="4206240" cy="786384"/>
           </a:xfrm>
           <a:prstGeom prst="rect">
             <a:avLst/>
@@ -8868,7 +9123,7 @@
               </a:spcAft>
             </a:pPr>
             <a:r>
-              <a:rPr sz="1200" b="0">
+              <a:rPr sz="1150" b="0">
                 <a:solidFill>
                   <a:srgbClr val="1A1A1A"/>
                 </a:solidFill>
@@ -8881,18 +9136,18 @@
       </p:sp>
       <p:sp>
         <p:nvSpPr>
-          <p:cNvPr id="10" name="Rounded Rectangle 9"/>
+          <p:cNvPr id="11" name="Rounded Rectangle 10"/>
           <p:cNvSpPr/>
           <p:nvPr/>
         </p:nvSpPr>
         <p:spPr>
           <a:xfrm>
-            <a:off x="841248" y="3273552"/>
-            <a:ext cx="5715000" cy="530352"/>
+            <a:off x="6254496" y="2670048"/>
+            <a:ext cx="5138928" cy="786384"/>
           </a:xfrm>
           <a:prstGeom prst="roundRect">
             <a:avLst>
-              <a:gd name="adj" fmla="val 6000"/>
+              <a:gd name="adj" fmla="val 7000"/>
             </a:avLst>
           </a:prstGeom>
           <a:solidFill>
@@ -8927,9 +9182,55 @@
           </a:p>
         </p:txBody>
       </p:sp>
+      <p:sp>
+        <p:nvSpPr>
+          <p:cNvPr id="12" name="Rounded Rectangle 11"/>
+          <p:cNvSpPr/>
+          <p:nvPr/>
+        </p:nvSpPr>
+        <p:spPr>
+          <a:xfrm>
+            <a:off x="6400800" y="2807208"/>
+            <a:ext cx="512064" cy="512064"/>
+          </a:xfrm>
+          <a:prstGeom prst="roundRect">
+            <a:avLst>
+              <a:gd name="adj" fmla="val 26000"/>
+            </a:avLst>
+          </a:prstGeom>
+          <a:solidFill>
+            <a:srgbClr val="EE0000"/>
+          </a:solidFill>
+          <a:ln>
+            <a:noFill/>
+          </a:ln>
+          <a:effectLst/>
+        </p:spPr>
+        <p:style>
+          <a:lnRef idx="1">
+            <a:schemeClr val="accent1"/>
+          </a:lnRef>
+          <a:fillRef idx="3">
+            <a:schemeClr val="accent1"/>
+          </a:fillRef>
+          <a:effectRef idx="2">
+            <a:schemeClr val="accent1"/>
+          </a:effectRef>
+          <a:fontRef idx="minor">
+            <a:schemeClr val="lt1"/>
+          </a:fontRef>
+        </p:style>
+        <p:txBody>
+          <a:bodyPr rtlCol="0" anchor="ctr"/>
+          <a:lstStyle/>
+          <a:p>
+            <a:pPr algn="ctr"/>
+          </a:p>
+        </p:txBody>
+      </p:sp>
       <p:pic>
         <p:nvPicPr>
-          <p:cNvPr id="11" name="Picture 10" descr="check_steel.png"/>
+          <p:cNvPr id="13" name="Picture 12" descr="check_white.png"/>
           <p:cNvPicPr>
             <a:picLocks noChangeAspect="1"/>
           </p:cNvPicPr>
@@ -8943,8 +9244,8 @@
         </p:blipFill>
         <p:spPr>
           <a:xfrm>
-            <a:off x="987552" y="3419856"/>
-            <a:ext cx="237744" cy="237744"/>
+            <a:off x="6523695" y="2930103"/>
+            <a:ext cx="266273" cy="266273"/>
           </a:xfrm>
           <a:prstGeom prst="rect">
             <a:avLst/>
@@ -8953,14 +9254,14 @@
       </p:pic>
       <p:sp>
         <p:nvSpPr>
-          <p:cNvPr id="12" name="TextBox 11"/>
+          <p:cNvPr id="14" name="TextBox 13"/>
           <p:cNvSpPr txBox="1"/>
           <p:nvPr/>
         </p:nvSpPr>
         <p:spPr>
           <a:xfrm>
-            <a:off x="1353312" y="3273552"/>
-            <a:ext cx="5029200" cy="530352"/>
+            <a:off x="7040880" y="2670048"/>
+            <a:ext cx="4206240" cy="786384"/>
           </a:xfrm>
           <a:prstGeom prst="rect">
             <a:avLst/>
@@ -8985,7 +9286,7 @@
               </a:spcAft>
             </a:pPr>
             <a:r>
-              <a:rPr sz="1200" b="0">
+              <a:rPr sz="1150" b="0">
                 <a:solidFill>
                   <a:srgbClr val="1A1A1A"/>
                 </a:solidFill>
@@ -8998,18 +9299,18 @@
       </p:sp>
       <p:sp>
         <p:nvSpPr>
-          <p:cNvPr id="13" name="Rounded Rectangle 12"/>
+          <p:cNvPr id="15" name="Rounded Rectangle 14"/>
           <p:cNvSpPr/>
           <p:nvPr/>
         </p:nvSpPr>
         <p:spPr>
           <a:xfrm>
-            <a:off x="841248" y="3877056"/>
-            <a:ext cx="5715000" cy="530352"/>
+            <a:off x="841248" y="3602736"/>
+            <a:ext cx="5138928" cy="786384"/>
           </a:xfrm>
           <a:prstGeom prst="roundRect">
             <a:avLst>
-              <a:gd name="adj" fmla="val 6000"/>
+              <a:gd name="adj" fmla="val 7000"/>
             </a:avLst>
           </a:prstGeom>
           <a:solidFill>
@@ -9044,9 +9345,55 @@
           </a:p>
         </p:txBody>
       </p:sp>
+      <p:sp>
+        <p:nvSpPr>
+          <p:cNvPr id="16" name="Rounded Rectangle 15"/>
+          <p:cNvSpPr/>
+          <p:nvPr/>
+        </p:nvSpPr>
+        <p:spPr>
+          <a:xfrm>
+            <a:off x="987552" y="3739896"/>
+            <a:ext cx="512064" cy="512064"/>
+          </a:xfrm>
+          <a:prstGeom prst="roundRect">
+            <a:avLst>
+              <a:gd name="adj" fmla="val 26000"/>
+            </a:avLst>
+          </a:prstGeom>
+          <a:solidFill>
+            <a:srgbClr val="EE0000"/>
+          </a:solidFill>
+          <a:ln>
+            <a:noFill/>
+          </a:ln>
+          <a:effectLst/>
+        </p:spPr>
+        <p:style>
+          <a:lnRef idx="1">
+            <a:schemeClr val="accent1"/>
+          </a:lnRef>
+          <a:fillRef idx="3">
+            <a:schemeClr val="accent1"/>
+          </a:fillRef>
+          <a:effectRef idx="2">
+            <a:schemeClr val="accent1"/>
+          </a:effectRef>
+          <a:fontRef idx="minor">
+            <a:schemeClr val="lt1"/>
+          </a:fontRef>
+        </p:style>
+        <p:txBody>
+          <a:bodyPr rtlCol="0" anchor="ctr"/>
+          <a:lstStyle/>
+          <a:p>
+            <a:pPr algn="ctr"/>
+          </a:p>
+        </p:txBody>
+      </p:sp>
       <p:pic>
         <p:nvPicPr>
-          <p:cNvPr id="14" name="Picture 13" descr="check_steel.png"/>
+          <p:cNvPr id="17" name="Picture 16" descr="check_white.png"/>
           <p:cNvPicPr>
             <a:picLocks noChangeAspect="1"/>
           </p:cNvPicPr>
@@ -9060,8 +9407,8 @@
         </p:blipFill>
         <p:spPr>
           <a:xfrm>
-            <a:off x="987552" y="4023360"/>
-            <a:ext cx="237744" cy="237744"/>
+            <a:off x="1110447" y="3862791"/>
+            <a:ext cx="266273" cy="266273"/>
           </a:xfrm>
           <a:prstGeom prst="rect">
             <a:avLst/>
@@ -9070,14 +9417,14 @@
       </p:pic>
       <p:sp>
         <p:nvSpPr>
-          <p:cNvPr id="15" name="TextBox 14"/>
+          <p:cNvPr id="18" name="TextBox 17"/>
           <p:cNvSpPr txBox="1"/>
           <p:nvPr/>
         </p:nvSpPr>
         <p:spPr>
           <a:xfrm>
-            <a:off x="1353312" y="3877056"/>
-            <a:ext cx="5029200" cy="530352"/>
+            <a:off x="1627632" y="3602736"/>
+            <a:ext cx="4206240" cy="786384"/>
           </a:xfrm>
           <a:prstGeom prst="rect">
             <a:avLst/>
@@ -9102,7 +9449,7 @@
               </a:spcAft>
             </a:pPr>
             <a:r>
-              <a:rPr sz="1200" b="0">
+              <a:rPr sz="1150" b="0">
                 <a:solidFill>
                   <a:srgbClr val="1A1A1A"/>
                 </a:solidFill>
@@ -9115,18 +9462,18 @@
       </p:sp>
       <p:sp>
         <p:nvSpPr>
-          <p:cNvPr id="16" name="Rounded Rectangle 15"/>
+          <p:cNvPr id="19" name="Rounded Rectangle 18"/>
           <p:cNvSpPr/>
           <p:nvPr/>
         </p:nvSpPr>
         <p:spPr>
           <a:xfrm>
-            <a:off x="841248" y="4480560"/>
-            <a:ext cx="5715000" cy="530352"/>
+            <a:off x="6254496" y="3602736"/>
+            <a:ext cx="5138928" cy="786384"/>
           </a:xfrm>
           <a:prstGeom prst="roundRect">
             <a:avLst>
-              <a:gd name="adj" fmla="val 6000"/>
+              <a:gd name="adj" fmla="val 7000"/>
             </a:avLst>
           </a:prstGeom>
           <a:solidFill>
@@ -9161,9 +9508,55 @@
           </a:p>
         </p:txBody>
       </p:sp>
+      <p:sp>
+        <p:nvSpPr>
+          <p:cNvPr id="20" name="Rounded Rectangle 19"/>
+          <p:cNvSpPr/>
+          <p:nvPr/>
+        </p:nvSpPr>
+        <p:spPr>
+          <a:xfrm>
+            <a:off x="6400800" y="3739896"/>
+            <a:ext cx="512064" cy="512064"/>
+          </a:xfrm>
+          <a:prstGeom prst="roundRect">
+            <a:avLst>
+              <a:gd name="adj" fmla="val 26000"/>
+            </a:avLst>
+          </a:prstGeom>
+          <a:solidFill>
+            <a:srgbClr val="EE0000"/>
+          </a:solidFill>
+          <a:ln>
+            <a:noFill/>
+          </a:ln>
+          <a:effectLst/>
+        </p:spPr>
+        <p:style>
+          <a:lnRef idx="1">
+            <a:schemeClr val="accent1"/>
+          </a:lnRef>
+          <a:fillRef idx="3">
+            <a:schemeClr val="accent1"/>
+          </a:fillRef>
+          <a:effectRef idx="2">
+            <a:schemeClr val="accent1"/>
+          </a:effectRef>
+          <a:fontRef idx="minor">
+            <a:schemeClr val="lt1"/>
+          </a:fontRef>
+        </p:style>
+        <p:txBody>
+          <a:bodyPr rtlCol="0" anchor="ctr"/>
+          <a:lstStyle/>
+          <a:p>
+            <a:pPr algn="ctr"/>
+          </a:p>
+        </p:txBody>
+      </p:sp>
       <p:pic>
         <p:nvPicPr>
-          <p:cNvPr id="17" name="Picture 16" descr="check_steel.png"/>
+          <p:cNvPr id="21" name="Picture 20" descr="check_white.png"/>
           <p:cNvPicPr>
             <a:picLocks noChangeAspect="1"/>
           </p:cNvPicPr>
@@ -9177,8 +9570,8 @@
         </p:blipFill>
         <p:spPr>
           <a:xfrm>
-            <a:off x="987552" y="4626864"/>
-            <a:ext cx="237744" cy="237744"/>
+            <a:off x="6523695" y="3862791"/>
+            <a:ext cx="266273" cy="266273"/>
           </a:xfrm>
           <a:prstGeom prst="rect">
             <a:avLst/>
@@ -9187,14 +9580,14 @@
       </p:pic>
       <p:sp>
         <p:nvSpPr>
-          <p:cNvPr id="18" name="TextBox 17"/>
+          <p:cNvPr id="22" name="TextBox 21"/>
           <p:cNvSpPr txBox="1"/>
           <p:nvPr/>
         </p:nvSpPr>
         <p:spPr>
           <a:xfrm>
-            <a:off x="1353312" y="4480560"/>
-            <a:ext cx="5029200" cy="530352"/>
+            <a:off x="7040880" y="3602736"/>
+            <a:ext cx="4206240" cy="786384"/>
           </a:xfrm>
           <a:prstGeom prst="rect">
             <a:avLst/>
@@ -9219,7 +9612,7 @@
               </a:spcAft>
             </a:pPr>
             <a:r>
-              <a:rPr sz="1200" b="0">
+              <a:rPr sz="1150" b="0">
                 <a:solidFill>
                   <a:srgbClr val="1A1A1A"/>
                 </a:solidFill>
@@ -9232,18 +9625,18 @@
       </p:sp>
       <p:sp>
         <p:nvSpPr>
-          <p:cNvPr id="19" name="Rounded Rectangle 18"/>
+          <p:cNvPr id="23" name="Rounded Rectangle 22"/>
           <p:cNvSpPr/>
           <p:nvPr/>
         </p:nvSpPr>
         <p:spPr>
           <a:xfrm>
-            <a:off x="841248" y="5084064"/>
-            <a:ext cx="5715000" cy="530352"/>
+            <a:off x="841248" y="4535424"/>
+            <a:ext cx="5138928" cy="786384"/>
           </a:xfrm>
           <a:prstGeom prst="roundRect">
             <a:avLst>
-              <a:gd name="adj" fmla="val 6000"/>
+              <a:gd name="adj" fmla="val 7000"/>
             </a:avLst>
           </a:prstGeom>
           <a:solidFill>
@@ -9278,9 +9671,55 @@
           </a:p>
         </p:txBody>
       </p:sp>
+      <p:sp>
+        <p:nvSpPr>
+          <p:cNvPr id="24" name="Rounded Rectangle 23"/>
+          <p:cNvSpPr/>
+          <p:nvPr/>
+        </p:nvSpPr>
+        <p:spPr>
+          <a:xfrm>
+            <a:off x="987552" y="4672584"/>
+            <a:ext cx="512064" cy="512064"/>
+          </a:xfrm>
+          <a:prstGeom prst="roundRect">
+            <a:avLst>
+              <a:gd name="adj" fmla="val 26000"/>
+            </a:avLst>
+          </a:prstGeom>
+          <a:solidFill>
+            <a:srgbClr val="EE0000"/>
+          </a:solidFill>
+          <a:ln>
+            <a:noFill/>
+          </a:ln>
+          <a:effectLst/>
+        </p:spPr>
+        <p:style>
+          <a:lnRef idx="1">
+            <a:schemeClr val="accent1"/>
+          </a:lnRef>
+          <a:fillRef idx="3">
+            <a:schemeClr val="accent1"/>
+          </a:fillRef>
+          <a:effectRef idx="2">
+            <a:schemeClr val="accent1"/>
+          </a:effectRef>
+          <a:fontRef idx="minor">
+            <a:schemeClr val="lt1"/>
+          </a:fontRef>
+        </p:style>
+        <p:txBody>
+          <a:bodyPr rtlCol="0" anchor="ctr"/>
+          <a:lstStyle/>
+          <a:p>
+            <a:pPr algn="ctr"/>
+          </a:p>
+        </p:txBody>
+      </p:sp>
       <p:pic>
         <p:nvPicPr>
-          <p:cNvPr id="20" name="Picture 19" descr="check_steel.png"/>
+          <p:cNvPr id="25" name="Picture 24" descr="check_white.png"/>
           <p:cNvPicPr>
             <a:picLocks noChangeAspect="1"/>
           </p:cNvPicPr>
@@ -9294,8 +9733,8 @@
         </p:blipFill>
         <p:spPr>
           <a:xfrm>
-            <a:off x="987552" y="5230368"/>
-            <a:ext cx="237744" cy="237744"/>
+            <a:off x="1110447" y="4795479"/>
+            <a:ext cx="266273" cy="266273"/>
           </a:xfrm>
           <a:prstGeom prst="rect">
             <a:avLst/>
@@ -9304,14 +9743,14 @@
       </p:pic>
       <p:sp>
         <p:nvSpPr>
-          <p:cNvPr id="21" name="TextBox 20"/>
+          <p:cNvPr id="26" name="TextBox 25"/>
           <p:cNvSpPr txBox="1"/>
           <p:nvPr/>
         </p:nvSpPr>
         <p:spPr>
           <a:xfrm>
-            <a:off x="1353312" y="5084064"/>
-            <a:ext cx="5029200" cy="530352"/>
+            <a:off x="1627632" y="4535424"/>
+            <a:ext cx="4206240" cy="786384"/>
           </a:xfrm>
           <a:prstGeom prst="rect">
             <a:avLst/>
@@ -9336,221 +9775,13 @@
               </a:spcAft>
             </a:pPr>
             <a:r>
-              <a:rPr sz="1200" b="0">
+              <a:rPr sz="1150" b="0">
                 <a:solidFill>
                   <a:srgbClr val="1A1A1A"/>
                 </a:solidFill>
                 <a:latin typeface="Red Hat Text"/>
               </a:rPr>
               <a:t>Bound tokens: short-lived, scoped, revocable</a:t>
-            </a:r>
-          </a:p>
-        </p:txBody>
-      </p:sp>
-      <p:sp>
-        <p:nvSpPr>
-          <p:cNvPr id="22" name="Rounded Rectangle 21"/>
-          <p:cNvSpPr/>
-          <p:nvPr/>
-        </p:nvSpPr>
-        <p:spPr>
-          <a:xfrm>
-            <a:off x="6812280" y="2670048"/>
-            <a:ext cx="4538167" cy="2944368"/>
-          </a:xfrm>
-          <a:prstGeom prst="roundRect">
-            <a:avLst>
-              <a:gd name="adj" fmla="val 4000"/>
-            </a:avLst>
-          </a:prstGeom>
-          <a:solidFill>
-            <a:srgbClr val="FFFFFF"/>
-          </a:solidFill>
-          <a:ln w="15240">
-            <a:solidFill>
-              <a:srgbClr val="DDE1E6"/>
-            </a:solidFill>
-          </a:ln>
-          <a:effectLst/>
-        </p:spPr>
-        <p:style>
-          <a:lnRef idx="1">
-            <a:schemeClr val="accent1"/>
-          </a:lnRef>
-          <a:fillRef idx="3">
-            <a:schemeClr val="accent1"/>
-          </a:fillRef>
-          <a:effectRef idx="2">
-            <a:schemeClr val="accent1"/>
-          </a:effectRef>
-          <a:fontRef idx="minor">
-            <a:schemeClr val="lt1"/>
-          </a:fontRef>
-        </p:style>
-        <p:txBody>
-          <a:bodyPr rtlCol="0" anchor="ctr"/>
-          <a:lstStyle/>
-          <a:p>
-            <a:pPr algn="ctr"/>
-          </a:p>
-        </p:txBody>
-      </p:sp>
-      <p:sp>
-        <p:nvSpPr>
-          <p:cNvPr id="23" name="Rounded Rectangle 22"/>
-          <p:cNvSpPr/>
-          <p:nvPr/>
-        </p:nvSpPr>
-        <p:spPr>
-          <a:xfrm>
-            <a:off x="7013448" y="2871216"/>
-            <a:ext cx="1298448" cy="310896"/>
-          </a:xfrm>
-          <a:prstGeom prst="roundRect">
-            <a:avLst>
-              <a:gd name="adj" fmla="val 50000"/>
-            </a:avLst>
-          </a:prstGeom>
-          <a:solidFill>
-            <a:srgbClr val="FCECEC"/>
-          </a:solidFill>
-          <a:ln>
-            <a:noFill/>
-          </a:ln>
-          <a:effectLst/>
-        </p:spPr>
-        <p:style>
-          <a:lnRef idx="1">
-            <a:schemeClr val="accent1"/>
-          </a:lnRef>
-          <a:fillRef idx="3">
-            <a:schemeClr val="accent1"/>
-          </a:fillRef>
-          <a:effectRef idx="2">
-            <a:schemeClr val="accent1"/>
-          </a:effectRef>
-          <a:fontRef idx="minor">
-            <a:schemeClr val="lt1"/>
-          </a:fontRef>
-        </p:style>
-        <p:txBody>
-          <a:bodyPr rtlCol="0" anchor="ctr"/>
-          <a:lstStyle/>
-          <a:p>
-            <a:pPr algn="ctr"/>
-          </a:p>
-        </p:txBody>
-      </p:sp>
-      <p:sp>
-        <p:nvSpPr>
-          <p:cNvPr id="24" name="TextBox 23"/>
-          <p:cNvSpPr txBox="1"/>
-          <p:nvPr/>
-        </p:nvSpPr>
-        <p:spPr>
-          <a:xfrm>
-            <a:off x="7013448" y="2871216"/>
-            <a:ext cx="1298448" cy="310896"/>
-          </a:xfrm>
-          <a:prstGeom prst="rect">
-            <a:avLst/>
-          </a:prstGeom>
-          <a:noFill/>
-        </p:spPr>
-        <p:txBody>
-          <a:bodyPr wrap="none" anchor="ctr" lIns="0" rIns="0" tIns="0" bIns="0">
-            <a:spAutoFit/>
-          </a:bodyPr>
-          <a:lstStyle/>
-          <a:p>
-            <a:pPr algn="ctr">
-              <a:lnSpc>
-                <a:spcPct val="106000"/>
-              </a:lnSpc>
-              <a:spcBef>
-                <a:spcPts val="0"/>
-              </a:spcBef>
-              <a:spcAft>
-                <a:spcPts val="0"/>
-              </a:spcAft>
-            </a:pPr>
-            <a:r>
-              <a:rPr sz="850" b="1">
-                <a:solidFill>
-                  <a:srgbClr val="B80000"/>
-                </a:solidFill>
-                <a:latin typeface="Red Hat Display"/>
-              </a:rPr>
-              <a:t>MEDIA PASS</a:t>
-            </a:r>
-          </a:p>
-        </p:txBody>
-      </p:sp>
-      <p:pic>
-        <p:nvPicPr>
-          <p:cNvPr id="25" name="Picture 24" descr="eye_slate.png"/>
-          <p:cNvPicPr>
-            <a:picLocks noChangeAspect="1"/>
-          </p:cNvPicPr>
-          <p:nvPr/>
-        </p:nvPicPr>
-        <p:blipFill>
-          <a:blip r:embed="rId4"/>
-          <a:stretch>
-            <a:fillRect/>
-          </a:stretch>
-        </p:blipFill>
-        <p:spPr>
-          <a:xfrm>
-            <a:off x="8843619" y="3383280"/>
-            <a:ext cx="475488" cy="475488"/>
-          </a:xfrm>
-          <a:prstGeom prst="rect">
-            <a:avLst/>
-          </a:prstGeom>
-        </p:spPr>
-      </p:pic>
-      <p:sp>
-        <p:nvSpPr>
-          <p:cNvPr id="26" name="TextBox 25"/>
-          <p:cNvSpPr txBox="1"/>
-          <p:nvPr/>
-        </p:nvSpPr>
-        <p:spPr>
-          <a:xfrm>
-            <a:off x="7050024" y="3995928"/>
-            <a:ext cx="4062679" cy="1481328"/>
-          </a:xfrm>
-          <a:prstGeom prst="rect">
-            <a:avLst/>
-          </a:prstGeom>
-          <a:noFill/>
-        </p:spPr>
-        <p:txBody>
-          <a:bodyPr wrap="square" anchor="t" lIns="0" rIns="0" tIns="0" bIns="0">
-            <a:spAutoFit/>
-          </a:bodyPr>
-          <a:lstStyle/>
-          <a:p>
-            <a:pPr algn="l">
-              <a:lnSpc>
-                <a:spcPct val="120000"/>
-              </a:lnSpc>
-              <a:spcBef>
-                <a:spcPts val="0"/>
-              </a:spcBef>
-              <a:spcAft>
-                <a:spcPts val="0"/>
-              </a:spcAft>
-            </a:pPr>
-            <a:r>
-              <a:rPr sz="950" b="0">
-                <a:solidFill>
-                  <a:srgbClr val="8A9099"/>
-                </a:solidFill>
-                <a:latin typeface="Red Hat Text"/>
-              </a:rPr>
-              <a:t>A namespace box with a fuel-gauge (quota), a price-tag stamp (LimitRange) on a Pod, and a ServiceAccount badge issuing a short-lived token chip.</a:t>
             </a:r>
           </a:p>
         </p:txBody>
@@ -9858,11 +10089,11 @@
         <p:spPr>
           <a:xfrm>
             <a:off x="841248" y="2395728"/>
-            <a:ext cx="5715000" cy="530352"/>
+            <a:ext cx="5138928" cy="786384"/>
           </a:xfrm>
           <a:prstGeom prst="roundRect">
             <a:avLst>
-              <a:gd name="adj" fmla="val 6000"/>
+              <a:gd name="adj" fmla="val 7000"/>
             </a:avLst>
           </a:prstGeom>
           <a:solidFill>
@@ -9897,9 +10128,55 @@
           </a:p>
         </p:txBody>
       </p:sp>
+      <p:sp>
+        <p:nvSpPr>
+          <p:cNvPr id="7" name="Rounded Rectangle 6"/>
+          <p:cNvSpPr/>
+          <p:nvPr/>
+        </p:nvSpPr>
+        <p:spPr>
+          <a:xfrm>
+            <a:off x="987552" y="2532888"/>
+            <a:ext cx="512064" cy="512064"/>
+          </a:xfrm>
+          <a:prstGeom prst="roundRect">
+            <a:avLst>
+              <a:gd name="adj" fmla="val 26000"/>
+            </a:avLst>
+          </a:prstGeom>
+          <a:solidFill>
+            <a:srgbClr val="EE0000"/>
+          </a:solidFill>
+          <a:ln>
+            <a:noFill/>
+          </a:ln>
+          <a:effectLst/>
+        </p:spPr>
+        <p:style>
+          <a:lnRef idx="1">
+            <a:schemeClr val="accent1"/>
+          </a:lnRef>
+          <a:fillRef idx="3">
+            <a:schemeClr val="accent1"/>
+          </a:fillRef>
+          <a:effectRef idx="2">
+            <a:schemeClr val="accent1"/>
+          </a:effectRef>
+          <a:fontRef idx="minor">
+            <a:schemeClr val="lt1"/>
+          </a:fontRef>
+        </p:style>
+        <p:txBody>
+          <a:bodyPr rtlCol="0" anchor="ctr"/>
+          <a:lstStyle/>
+          <a:p>
+            <a:pPr algn="ctr"/>
+          </a:p>
+        </p:txBody>
+      </p:sp>
       <p:pic>
         <p:nvPicPr>
-          <p:cNvPr id="7" name="Picture 6" descr="check_steel.png"/>
+          <p:cNvPr id="8" name="Picture 7" descr="check_white.png"/>
           <p:cNvPicPr>
             <a:picLocks noChangeAspect="1"/>
           </p:cNvPicPr>
@@ -9913,8 +10190,8 @@
         </p:blipFill>
         <p:spPr>
           <a:xfrm>
-            <a:off x="987552" y="2542032"/>
-            <a:ext cx="237744" cy="237744"/>
+            <a:off x="1110447" y="2655783"/>
+            <a:ext cx="266273" cy="266273"/>
           </a:xfrm>
           <a:prstGeom prst="rect">
             <a:avLst/>
@@ -9923,14 +10200,14 @@
       </p:pic>
       <p:sp>
         <p:nvSpPr>
-          <p:cNvPr id="8" name="TextBox 7"/>
+          <p:cNvPr id="9" name="TextBox 8"/>
           <p:cNvSpPr txBox="1"/>
           <p:nvPr/>
         </p:nvSpPr>
         <p:spPr>
           <a:xfrm>
-            <a:off x="1353312" y="2395728"/>
-            <a:ext cx="5029200" cy="530352"/>
+            <a:off x="1627632" y="2395728"/>
+            <a:ext cx="4206240" cy="786384"/>
           </a:xfrm>
           <a:prstGeom prst="rect">
             <a:avLst/>
@@ -9955,7 +10232,7 @@
               </a:spcAft>
             </a:pPr>
             <a:r>
-              <a:rPr sz="1200" b="0">
+              <a:rPr sz="1150" b="0">
                 <a:solidFill>
                   <a:srgbClr val="1A1A1A"/>
                 </a:solidFill>
@@ -9968,18 +10245,18 @@
       </p:sp>
       <p:sp>
         <p:nvSpPr>
-          <p:cNvPr id="9" name="Rounded Rectangle 8"/>
+          <p:cNvPr id="10" name="Rounded Rectangle 9"/>
           <p:cNvSpPr/>
           <p:nvPr/>
         </p:nvSpPr>
         <p:spPr>
           <a:xfrm>
-            <a:off x="841248" y="2999232"/>
-            <a:ext cx="5715000" cy="530352"/>
+            <a:off x="6254496" y="2395728"/>
+            <a:ext cx="5138928" cy="786384"/>
           </a:xfrm>
           <a:prstGeom prst="roundRect">
             <a:avLst>
-              <a:gd name="adj" fmla="val 6000"/>
+              <a:gd name="adj" fmla="val 7000"/>
             </a:avLst>
           </a:prstGeom>
           <a:solidFill>
@@ -10014,9 +10291,55 @@
           </a:p>
         </p:txBody>
       </p:sp>
+      <p:sp>
+        <p:nvSpPr>
+          <p:cNvPr id="11" name="Rounded Rectangle 10"/>
+          <p:cNvSpPr/>
+          <p:nvPr/>
+        </p:nvSpPr>
+        <p:spPr>
+          <a:xfrm>
+            <a:off x="6400800" y="2532888"/>
+            <a:ext cx="512064" cy="512064"/>
+          </a:xfrm>
+          <a:prstGeom prst="roundRect">
+            <a:avLst>
+              <a:gd name="adj" fmla="val 26000"/>
+            </a:avLst>
+          </a:prstGeom>
+          <a:solidFill>
+            <a:srgbClr val="EE0000"/>
+          </a:solidFill>
+          <a:ln>
+            <a:noFill/>
+          </a:ln>
+          <a:effectLst/>
+        </p:spPr>
+        <p:style>
+          <a:lnRef idx="1">
+            <a:schemeClr val="accent1"/>
+          </a:lnRef>
+          <a:fillRef idx="3">
+            <a:schemeClr val="accent1"/>
+          </a:fillRef>
+          <a:effectRef idx="2">
+            <a:schemeClr val="accent1"/>
+          </a:effectRef>
+          <a:fontRef idx="minor">
+            <a:schemeClr val="lt1"/>
+          </a:fontRef>
+        </p:style>
+        <p:txBody>
+          <a:bodyPr rtlCol="0" anchor="ctr"/>
+          <a:lstStyle/>
+          <a:p>
+            <a:pPr algn="ctr"/>
+          </a:p>
+        </p:txBody>
+      </p:sp>
       <p:pic>
         <p:nvPicPr>
-          <p:cNvPr id="10" name="Picture 9" descr="check_steel.png"/>
+          <p:cNvPr id="12" name="Picture 11" descr="check_white.png"/>
           <p:cNvPicPr>
             <a:picLocks noChangeAspect="1"/>
           </p:cNvPicPr>
@@ -10030,8 +10353,8 @@
         </p:blipFill>
         <p:spPr>
           <a:xfrm>
-            <a:off x="987552" y="3145536"/>
-            <a:ext cx="237744" cy="237744"/>
+            <a:off x="6523695" y="2655783"/>
+            <a:ext cx="266273" cy="266273"/>
           </a:xfrm>
           <a:prstGeom prst="rect">
             <a:avLst/>
@@ -10040,14 +10363,14 @@
       </p:pic>
       <p:sp>
         <p:nvSpPr>
-          <p:cNvPr id="11" name="TextBox 10"/>
+          <p:cNvPr id="13" name="TextBox 12"/>
           <p:cNvSpPr txBox="1"/>
           <p:nvPr/>
         </p:nvSpPr>
         <p:spPr>
           <a:xfrm>
-            <a:off x="1353312" y="2999232"/>
-            <a:ext cx="5029200" cy="530352"/>
+            <a:off x="7040880" y="2395728"/>
+            <a:ext cx="4206240" cy="786384"/>
           </a:xfrm>
           <a:prstGeom prst="rect">
             <a:avLst/>
@@ -10072,7 +10395,7 @@
               </a:spcAft>
             </a:pPr>
             <a:r>
-              <a:rPr sz="1200" b="0">
+              <a:rPr sz="1150" b="0">
                 <a:solidFill>
                   <a:srgbClr val="1A1A1A"/>
                 </a:solidFill>
@@ -10085,18 +10408,18 @@
       </p:sp>
       <p:sp>
         <p:nvSpPr>
-          <p:cNvPr id="12" name="Rounded Rectangle 11"/>
+          <p:cNvPr id="14" name="Rounded Rectangle 13"/>
           <p:cNvSpPr/>
           <p:nvPr/>
         </p:nvSpPr>
         <p:spPr>
           <a:xfrm>
-            <a:off x="841248" y="3602736"/>
-            <a:ext cx="5715000" cy="530352"/>
+            <a:off x="841248" y="3328416"/>
+            <a:ext cx="5138928" cy="786384"/>
           </a:xfrm>
           <a:prstGeom prst="roundRect">
             <a:avLst>
-              <a:gd name="adj" fmla="val 6000"/>
+              <a:gd name="adj" fmla="val 7000"/>
             </a:avLst>
           </a:prstGeom>
           <a:solidFill>
@@ -10131,9 +10454,55 @@
           </a:p>
         </p:txBody>
       </p:sp>
+      <p:sp>
+        <p:nvSpPr>
+          <p:cNvPr id="15" name="Rounded Rectangle 14"/>
+          <p:cNvSpPr/>
+          <p:nvPr/>
+        </p:nvSpPr>
+        <p:spPr>
+          <a:xfrm>
+            <a:off x="987552" y="3465576"/>
+            <a:ext cx="512064" cy="512064"/>
+          </a:xfrm>
+          <a:prstGeom prst="roundRect">
+            <a:avLst>
+              <a:gd name="adj" fmla="val 26000"/>
+            </a:avLst>
+          </a:prstGeom>
+          <a:solidFill>
+            <a:srgbClr val="EE0000"/>
+          </a:solidFill>
+          <a:ln>
+            <a:noFill/>
+          </a:ln>
+          <a:effectLst/>
+        </p:spPr>
+        <p:style>
+          <a:lnRef idx="1">
+            <a:schemeClr val="accent1"/>
+          </a:lnRef>
+          <a:fillRef idx="3">
+            <a:schemeClr val="accent1"/>
+          </a:fillRef>
+          <a:effectRef idx="2">
+            <a:schemeClr val="accent1"/>
+          </a:effectRef>
+          <a:fontRef idx="minor">
+            <a:schemeClr val="lt1"/>
+          </a:fontRef>
+        </p:style>
+        <p:txBody>
+          <a:bodyPr rtlCol="0" anchor="ctr"/>
+          <a:lstStyle/>
+          <a:p>
+            <a:pPr algn="ctr"/>
+          </a:p>
+        </p:txBody>
+      </p:sp>
       <p:pic>
         <p:nvPicPr>
-          <p:cNvPr id="13" name="Picture 12" descr="check_steel.png"/>
+          <p:cNvPr id="16" name="Picture 15" descr="check_white.png"/>
           <p:cNvPicPr>
             <a:picLocks noChangeAspect="1"/>
           </p:cNvPicPr>
@@ -10147,8 +10516,8 @@
         </p:blipFill>
         <p:spPr>
           <a:xfrm>
-            <a:off x="987552" y="3749040"/>
-            <a:ext cx="237744" cy="237744"/>
+            <a:off x="1110447" y="3588471"/>
+            <a:ext cx="266273" cy="266273"/>
           </a:xfrm>
           <a:prstGeom prst="rect">
             <a:avLst/>
@@ -10157,14 +10526,14 @@
       </p:pic>
       <p:sp>
         <p:nvSpPr>
-          <p:cNvPr id="14" name="TextBox 13"/>
+          <p:cNvPr id="17" name="TextBox 16"/>
           <p:cNvSpPr txBox="1"/>
           <p:nvPr/>
         </p:nvSpPr>
         <p:spPr>
           <a:xfrm>
-            <a:off x="1353312" y="3602736"/>
-            <a:ext cx="5029200" cy="530352"/>
+            <a:off x="1627632" y="3328416"/>
+            <a:ext cx="4206240" cy="786384"/>
           </a:xfrm>
           <a:prstGeom prst="rect">
             <a:avLst/>
@@ -10189,7 +10558,7 @@
               </a:spcAft>
             </a:pPr>
             <a:r>
-              <a:rPr sz="1200" b="0">
+              <a:rPr sz="1150" b="0">
                 <a:solidFill>
                   <a:srgbClr val="1A1A1A"/>
                 </a:solidFill>
@@ -10202,18 +10571,18 @@
       </p:sp>
       <p:sp>
         <p:nvSpPr>
-          <p:cNvPr id="15" name="Rounded Rectangle 14"/>
+          <p:cNvPr id="18" name="Rounded Rectangle 17"/>
           <p:cNvSpPr/>
           <p:nvPr/>
         </p:nvSpPr>
         <p:spPr>
           <a:xfrm>
-            <a:off x="841248" y="4206240"/>
-            <a:ext cx="5715000" cy="530352"/>
+            <a:off x="6254496" y="3328416"/>
+            <a:ext cx="5138928" cy="786384"/>
           </a:xfrm>
           <a:prstGeom prst="roundRect">
             <a:avLst>
-              <a:gd name="adj" fmla="val 6000"/>
+              <a:gd name="adj" fmla="val 7000"/>
             </a:avLst>
           </a:prstGeom>
           <a:solidFill>
@@ -10248,9 +10617,55 @@
           </a:p>
         </p:txBody>
       </p:sp>
+      <p:sp>
+        <p:nvSpPr>
+          <p:cNvPr id="19" name="Rounded Rectangle 18"/>
+          <p:cNvSpPr/>
+          <p:nvPr/>
+        </p:nvSpPr>
+        <p:spPr>
+          <a:xfrm>
+            <a:off x="6400800" y="3465576"/>
+            <a:ext cx="512064" cy="512064"/>
+          </a:xfrm>
+          <a:prstGeom prst="roundRect">
+            <a:avLst>
+              <a:gd name="adj" fmla="val 26000"/>
+            </a:avLst>
+          </a:prstGeom>
+          <a:solidFill>
+            <a:srgbClr val="EE0000"/>
+          </a:solidFill>
+          <a:ln>
+            <a:noFill/>
+          </a:ln>
+          <a:effectLst/>
+        </p:spPr>
+        <p:style>
+          <a:lnRef idx="1">
+            <a:schemeClr val="accent1"/>
+          </a:lnRef>
+          <a:fillRef idx="3">
+            <a:schemeClr val="accent1"/>
+          </a:fillRef>
+          <a:effectRef idx="2">
+            <a:schemeClr val="accent1"/>
+          </a:effectRef>
+          <a:fontRef idx="minor">
+            <a:schemeClr val="lt1"/>
+          </a:fontRef>
+        </p:style>
+        <p:txBody>
+          <a:bodyPr rtlCol="0" anchor="ctr"/>
+          <a:lstStyle/>
+          <a:p>
+            <a:pPr algn="ctr"/>
+          </a:p>
+        </p:txBody>
+      </p:sp>
       <p:pic>
         <p:nvPicPr>
-          <p:cNvPr id="16" name="Picture 15" descr="check_steel.png"/>
+          <p:cNvPr id="20" name="Picture 19" descr="check_white.png"/>
           <p:cNvPicPr>
             <a:picLocks noChangeAspect="1"/>
           </p:cNvPicPr>
@@ -10264,8 +10679,8 @@
         </p:blipFill>
         <p:spPr>
           <a:xfrm>
-            <a:off x="987552" y="4352544"/>
-            <a:ext cx="237744" cy="237744"/>
+            <a:off x="6523695" y="3588471"/>
+            <a:ext cx="266273" cy="266273"/>
           </a:xfrm>
           <a:prstGeom prst="rect">
             <a:avLst/>
@@ -10274,14 +10689,14 @@
       </p:pic>
       <p:sp>
         <p:nvSpPr>
-          <p:cNvPr id="17" name="TextBox 16"/>
+          <p:cNvPr id="21" name="TextBox 20"/>
           <p:cNvSpPr txBox="1"/>
           <p:nvPr/>
         </p:nvSpPr>
         <p:spPr>
           <a:xfrm>
-            <a:off x="1353312" y="4206240"/>
-            <a:ext cx="5029200" cy="530352"/>
+            <a:off x="7040880" y="3328416"/>
+            <a:ext cx="4206240" cy="786384"/>
           </a:xfrm>
           <a:prstGeom prst="rect">
             <a:avLst/>
@@ -10306,7 +10721,7 @@
               </a:spcAft>
             </a:pPr>
             <a:r>
-              <a:rPr sz="1200" b="0">
+              <a:rPr sz="1150" b="0">
                 <a:solidFill>
                   <a:srgbClr val="1A1A1A"/>
                 </a:solidFill>
@@ -10319,18 +10734,18 @@
       </p:sp>
       <p:sp>
         <p:nvSpPr>
-          <p:cNvPr id="18" name="Rounded Rectangle 17"/>
+          <p:cNvPr id="22" name="Rounded Rectangle 21"/>
           <p:cNvSpPr/>
           <p:nvPr/>
         </p:nvSpPr>
         <p:spPr>
           <a:xfrm>
-            <a:off x="841248" y="4809744"/>
-            <a:ext cx="5715000" cy="530352"/>
+            <a:off x="841248" y="4261104"/>
+            <a:ext cx="5138928" cy="786384"/>
           </a:xfrm>
           <a:prstGeom prst="roundRect">
             <a:avLst>
-              <a:gd name="adj" fmla="val 6000"/>
+              <a:gd name="adj" fmla="val 7000"/>
             </a:avLst>
           </a:prstGeom>
           <a:solidFill>
@@ -10365,9 +10780,55 @@
           </a:p>
         </p:txBody>
       </p:sp>
+      <p:sp>
+        <p:nvSpPr>
+          <p:cNvPr id="23" name="Rounded Rectangle 22"/>
+          <p:cNvSpPr/>
+          <p:nvPr/>
+        </p:nvSpPr>
+        <p:spPr>
+          <a:xfrm>
+            <a:off x="987552" y="4398264"/>
+            <a:ext cx="512064" cy="512064"/>
+          </a:xfrm>
+          <a:prstGeom prst="roundRect">
+            <a:avLst>
+              <a:gd name="adj" fmla="val 26000"/>
+            </a:avLst>
+          </a:prstGeom>
+          <a:solidFill>
+            <a:srgbClr val="EE0000"/>
+          </a:solidFill>
+          <a:ln>
+            <a:noFill/>
+          </a:ln>
+          <a:effectLst/>
+        </p:spPr>
+        <p:style>
+          <a:lnRef idx="1">
+            <a:schemeClr val="accent1"/>
+          </a:lnRef>
+          <a:fillRef idx="3">
+            <a:schemeClr val="accent1"/>
+          </a:fillRef>
+          <a:effectRef idx="2">
+            <a:schemeClr val="accent1"/>
+          </a:effectRef>
+          <a:fontRef idx="minor">
+            <a:schemeClr val="lt1"/>
+          </a:fontRef>
+        </p:style>
+        <p:txBody>
+          <a:bodyPr rtlCol="0" anchor="ctr"/>
+          <a:lstStyle/>
+          <a:p>
+            <a:pPr algn="ctr"/>
+          </a:p>
+        </p:txBody>
+      </p:sp>
       <p:pic>
         <p:nvPicPr>
-          <p:cNvPr id="19" name="Picture 18" descr="check_steel.png"/>
+          <p:cNvPr id="24" name="Picture 23" descr="check_white.png"/>
           <p:cNvPicPr>
             <a:picLocks noChangeAspect="1"/>
           </p:cNvPicPr>
@@ -10381,8 +10842,8 @@
         </p:blipFill>
         <p:spPr>
           <a:xfrm>
-            <a:off x="987552" y="4956048"/>
-            <a:ext cx="237744" cy="237744"/>
+            <a:off x="1110447" y="4521159"/>
+            <a:ext cx="266273" cy="266273"/>
           </a:xfrm>
           <a:prstGeom prst="rect">
             <a:avLst/>
@@ -10391,14 +10852,14 @@
       </p:pic>
       <p:sp>
         <p:nvSpPr>
-          <p:cNvPr id="20" name="TextBox 19"/>
+          <p:cNvPr id="25" name="TextBox 24"/>
           <p:cNvSpPr txBox="1"/>
           <p:nvPr/>
         </p:nvSpPr>
         <p:spPr>
           <a:xfrm>
-            <a:off x="1353312" y="4809744"/>
-            <a:ext cx="5029200" cy="530352"/>
+            <a:off x="1627632" y="4261104"/>
+            <a:ext cx="4206240" cy="786384"/>
           </a:xfrm>
           <a:prstGeom prst="rect">
             <a:avLst/>
@@ -10423,221 +10884,13 @@
               </a:spcAft>
             </a:pPr>
             <a:r>
-              <a:rPr sz="1200" b="0">
+              <a:rPr sz="1150" b="0">
                 <a:solidFill>
                   <a:srgbClr val="1A1A1A"/>
                 </a:solidFill>
                 <a:latin typeface="Red Hat Text"/>
               </a:rPr>
               <a:t>Isolation is a cost multiplier — buy what you must</a:t>
-            </a:r>
-          </a:p>
-        </p:txBody>
-      </p:sp>
-      <p:sp>
-        <p:nvSpPr>
-          <p:cNvPr id="21" name="Rounded Rectangle 20"/>
-          <p:cNvSpPr/>
-          <p:nvPr/>
-        </p:nvSpPr>
-        <p:spPr>
-          <a:xfrm>
-            <a:off x="6812280" y="2395728"/>
-            <a:ext cx="4538167" cy="2944368"/>
-          </a:xfrm>
-          <a:prstGeom prst="roundRect">
-            <a:avLst>
-              <a:gd name="adj" fmla="val 4000"/>
-            </a:avLst>
-          </a:prstGeom>
-          <a:solidFill>
-            <a:srgbClr val="FFFFFF"/>
-          </a:solidFill>
-          <a:ln w="15240">
-            <a:solidFill>
-              <a:srgbClr val="DDE1E6"/>
-            </a:solidFill>
-          </a:ln>
-          <a:effectLst/>
-        </p:spPr>
-        <p:style>
-          <a:lnRef idx="1">
-            <a:schemeClr val="accent1"/>
-          </a:lnRef>
-          <a:fillRef idx="3">
-            <a:schemeClr val="accent1"/>
-          </a:fillRef>
-          <a:effectRef idx="2">
-            <a:schemeClr val="accent1"/>
-          </a:effectRef>
-          <a:fontRef idx="minor">
-            <a:schemeClr val="lt1"/>
-          </a:fontRef>
-        </p:style>
-        <p:txBody>
-          <a:bodyPr rtlCol="0" anchor="ctr"/>
-          <a:lstStyle/>
-          <a:p>
-            <a:pPr algn="ctr"/>
-          </a:p>
-        </p:txBody>
-      </p:sp>
-      <p:sp>
-        <p:nvSpPr>
-          <p:cNvPr id="22" name="Rounded Rectangle 21"/>
-          <p:cNvSpPr/>
-          <p:nvPr/>
-        </p:nvSpPr>
-        <p:spPr>
-          <a:xfrm>
-            <a:off x="7013448" y="2596896"/>
-            <a:ext cx="1298448" cy="310896"/>
-          </a:xfrm>
-          <a:prstGeom prst="roundRect">
-            <a:avLst>
-              <a:gd name="adj" fmla="val 50000"/>
-            </a:avLst>
-          </a:prstGeom>
-          <a:solidFill>
-            <a:srgbClr val="FCECEC"/>
-          </a:solidFill>
-          <a:ln>
-            <a:noFill/>
-          </a:ln>
-          <a:effectLst/>
-        </p:spPr>
-        <p:style>
-          <a:lnRef idx="1">
-            <a:schemeClr val="accent1"/>
-          </a:lnRef>
-          <a:fillRef idx="3">
-            <a:schemeClr val="accent1"/>
-          </a:fillRef>
-          <a:effectRef idx="2">
-            <a:schemeClr val="accent1"/>
-          </a:effectRef>
-          <a:fontRef idx="minor">
-            <a:schemeClr val="lt1"/>
-          </a:fontRef>
-        </p:style>
-        <p:txBody>
-          <a:bodyPr rtlCol="0" anchor="ctr"/>
-          <a:lstStyle/>
-          <a:p>
-            <a:pPr algn="ctr"/>
-          </a:p>
-        </p:txBody>
-      </p:sp>
-      <p:sp>
-        <p:nvSpPr>
-          <p:cNvPr id="23" name="TextBox 22"/>
-          <p:cNvSpPr txBox="1"/>
-          <p:nvPr/>
-        </p:nvSpPr>
-        <p:spPr>
-          <a:xfrm>
-            <a:off x="7013448" y="2596896"/>
-            <a:ext cx="1298448" cy="310896"/>
-          </a:xfrm>
-          <a:prstGeom prst="rect">
-            <a:avLst/>
-          </a:prstGeom>
-          <a:noFill/>
-        </p:spPr>
-        <p:txBody>
-          <a:bodyPr wrap="none" anchor="ctr" lIns="0" rIns="0" tIns="0" bIns="0">
-            <a:spAutoFit/>
-          </a:bodyPr>
-          <a:lstStyle/>
-          <a:p>
-            <a:pPr algn="ctr">
-              <a:lnSpc>
-                <a:spcPct val="106000"/>
-              </a:lnSpc>
-              <a:spcBef>
-                <a:spcPts val="0"/>
-              </a:spcBef>
-              <a:spcAft>
-                <a:spcPts val="0"/>
-              </a:spcAft>
-            </a:pPr>
-            <a:r>
-              <a:rPr sz="850" b="1">
-                <a:solidFill>
-                  <a:srgbClr val="B80000"/>
-                </a:solidFill>
-                <a:latin typeface="Red Hat Display"/>
-              </a:rPr>
-              <a:t>MEDIA PASS</a:t>
-            </a:r>
-          </a:p>
-        </p:txBody>
-      </p:sp>
-      <p:pic>
-        <p:nvPicPr>
-          <p:cNvPr id="24" name="Picture 23" descr="eye_slate.png"/>
-          <p:cNvPicPr>
-            <a:picLocks noChangeAspect="1"/>
-          </p:cNvPicPr>
-          <p:nvPr/>
-        </p:nvPicPr>
-        <p:blipFill>
-          <a:blip r:embed="rId4"/>
-          <a:stretch>
-            <a:fillRect/>
-          </a:stretch>
-        </p:blipFill>
-        <p:spPr>
-          <a:xfrm>
-            <a:off x="8843619" y="3108960"/>
-            <a:ext cx="475488" cy="475488"/>
-          </a:xfrm>
-          <a:prstGeom prst="rect">
-            <a:avLst/>
-          </a:prstGeom>
-        </p:spPr>
-      </p:pic>
-      <p:sp>
-        <p:nvSpPr>
-          <p:cNvPr id="25" name="TextBox 24"/>
-          <p:cNvSpPr txBox="1"/>
-          <p:nvPr/>
-        </p:nvSpPr>
-        <p:spPr>
-          <a:xfrm>
-            <a:off x="7050024" y="3721608"/>
-            <a:ext cx="4062679" cy="1481328"/>
-          </a:xfrm>
-          <a:prstGeom prst="rect">
-            <a:avLst/>
-          </a:prstGeom>
-          <a:noFill/>
-        </p:spPr>
-        <p:txBody>
-          <a:bodyPr wrap="square" anchor="t" lIns="0" rIns="0" tIns="0" bIns="0">
-            <a:spAutoFit/>
-          </a:bodyPr>
-          <a:lstStyle/>
-          <a:p>
-            <a:pPr algn="l">
-              <a:lnSpc>
-                <a:spcPct val="120000"/>
-              </a:lnSpc>
-              <a:spcBef>
-                <a:spcPts val="0"/>
-              </a:spcBef>
-              <a:spcAft>
-                <a:spcPts val="0"/>
-              </a:spcAft>
-            </a:pPr>
-            <a:r>
-              <a:rPr sz="950" b="0">
-                <a:solidFill>
-                  <a:srgbClr val="8A9099"/>
-                </a:solidFill>
-                <a:latin typeface="Red Hat Text"/>
-              </a:rPr>
-              <a:t>A horizontal spectrum bar: namespace-per-team → vClusters/HCP → cluster-per-team, with cost and isolation arrows pointing opposite directions.</a:t>
             </a:r>
           </a:p>
         </p:txBody>
@@ -10945,11 +11198,11 @@
         <p:spPr>
           <a:xfrm>
             <a:off x="841248" y="2395728"/>
-            <a:ext cx="5715000" cy="530352"/>
+            <a:ext cx="5138928" cy="786384"/>
           </a:xfrm>
           <a:prstGeom prst="roundRect">
             <a:avLst>
-              <a:gd name="adj" fmla="val 6000"/>
+              <a:gd name="adj" fmla="val 7000"/>
             </a:avLst>
           </a:prstGeom>
           <a:solidFill>
@@ -10984,9 +11237,55 @@
           </a:p>
         </p:txBody>
       </p:sp>
+      <p:sp>
+        <p:nvSpPr>
+          <p:cNvPr id="7" name="Rounded Rectangle 6"/>
+          <p:cNvSpPr/>
+          <p:nvPr/>
+        </p:nvSpPr>
+        <p:spPr>
+          <a:xfrm>
+            <a:off x="987552" y="2532888"/>
+            <a:ext cx="512064" cy="512064"/>
+          </a:xfrm>
+          <a:prstGeom prst="roundRect">
+            <a:avLst>
+              <a:gd name="adj" fmla="val 26000"/>
+            </a:avLst>
+          </a:prstGeom>
+          <a:solidFill>
+            <a:srgbClr val="EE0000"/>
+          </a:solidFill>
+          <a:ln>
+            <a:noFill/>
+          </a:ln>
+          <a:effectLst/>
+        </p:spPr>
+        <p:style>
+          <a:lnRef idx="1">
+            <a:schemeClr val="accent1"/>
+          </a:lnRef>
+          <a:fillRef idx="3">
+            <a:schemeClr val="accent1"/>
+          </a:fillRef>
+          <a:effectRef idx="2">
+            <a:schemeClr val="accent1"/>
+          </a:effectRef>
+          <a:fontRef idx="minor">
+            <a:schemeClr val="lt1"/>
+          </a:fontRef>
+        </p:style>
+        <p:txBody>
+          <a:bodyPr rtlCol="0" anchor="ctr"/>
+          <a:lstStyle/>
+          <a:p>
+            <a:pPr algn="ctr"/>
+          </a:p>
+        </p:txBody>
+      </p:sp>
       <p:pic>
         <p:nvPicPr>
-          <p:cNvPr id="7" name="Picture 6" descr="check_steel.png"/>
+          <p:cNvPr id="8" name="Picture 7" descr="check_white.png"/>
           <p:cNvPicPr>
             <a:picLocks noChangeAspect="1"/>
           </p:cNvPicPr>
@@ -11000,8 +11299,8 @@
         </p:blipFill>
         <p:spPr>
           <a:xfrm>
-            <a:off x="987552" y="2542032"/>
-            <a:ext cx="237744" cy="237744"/>
+            <a:off x="1110447" y="2655783"/>
+            <a:ext cx="266273" cy="266273"/>
           </a:xfrm>
           <a:prstGeom prst="rect">
             <a:avLst/>
@@ -11010,14 +11309,14 @@
       </p:pic>
       <p:sp>
         <p:nvSpPr>
-          <p:cNvPr id="8" name="TextBox 7"/>
+          <p:cNvPr id="9" name="TextBox 8"/>
           <p:cNvSpPr txBox="1"/>
           <p:nvPr/>
         </p:nvSpPr>
         <p:spPr>
           <a:xfrm>
-            <a:off x="1353312" y="2395728"/>
-            <a:ext cx="5029200" cy="530352"/>
+            <a:off x="1627632" y="2395728"/>
+            <a:ext cx="4206240" cy="786384"/>
           </a:xfrm>
           <a:prstGeom prst="rect">
             <a:avLst/>
@@ -11042,7 +11341,7 @@
               </a:spcAft>
             </a:pPr>
             <a:r>
-              <a:rPr sz="1200" b="0">
+              <a:rPr sz="1150" b="0">
                 <a:solidFill>
                   <a:srgbClr val="1A1A1A"/>
                 </a:solidFill>
@@ -11055,18 +11354,18 @@
       </p:sp>
       <p:sp>
         <p:nvSpPr>
-          <p:cNvPr id="9" name="Rounded Rectangle 8"/>
+          <p:cNvPr id="10" name="Rounded Rectangle 9"/>
           <p:cNvSpPr/>
           <p:nvPr/>
         </p:nvSpPr>
         <p:spPr>
           <a:xfrm>
-            <a:off x="841248" y="2999232"/>
-            <a:ext cx="5715000" cy="530352"/>
+            <a:off x="6254496" y="2395728"/>
+            <a:ext cx="5138928" cy="786384"/>
           </a:xfrm>
           <a:prstGeom prst="roundRect">
             <a:avLst>
-              <a:gd name="adj" fmla="val 6000"/>
+              <a:gd name="adj" fmla="val 7000"/>
             </a:avLst>
           </a:prstGeom>
           <a:solidFill>
@@ -11101,9 +11400,55 @@
           </a:p>
         </p:txBody>
       </p:sp>
+      <p:sp>
+        <p:nvSpPr>
+          <p:cNvPr id="11" name="Rounded Rectangle 10"/>
+          <p:cNvSpPr/>
+          <p:nvPr/>
+        </p:nvSpPr>
+        <p:spPr>
+          <a:xfrm>
+            <a:off x="6400800" y="2532888"/>
+            <a:ext cx="512064" cy="512064"/>
+          </a:xfrm>
+          <a:prstGeom prst="roundRect">
+            <a:avLst>
+              <a:gd name="adj" fmla="val 26000"/>
+            </a:avLst>
+          </a:prstGeom>
+          <a:solidFill>
+            <a:srgbClr val="EE0000"/>
+          </a:solidFill>
+          <a:ln>
+            <a:noFill/>
+          </a:ln>
+          <a:effectLst/>
+        </p:spPr>
+        <p:style>
+          <a:lnRef idx="1">
+            <a:schemeClr val="accent1"/>
+          </a:lnRef>
+          <a:fillRef idx="3">
+            <a:schemeClr val="accent1"/>
+          </a:fillRef>
+          <a:effectRef idx="2">
+            <a:schemeClr val="accent1"/>
+          </a:effectRef>
+          <a:fontRef idx="minor">
+            <a:schemeClr val="lt1"/>
+          </a:fontRef>
+        </p:style>
+        <p:txBody>
+          <a:bodyPr rtlCol="0" anchor="ctr"/>
+          <a:lstStyle/>
+          <a:p>
+            <a:pPr algn="ctr"/>
+          </a:p>
+        </p:txBody>
+      </p:sp>
       <p:pic>
         <p:nvPicPr>
-          <p:cNvPr id="10" name="Picture 9" descr="check_steel.png"/>
+          <p:cNvPr id="12" name="Picture 11" descr="check_white.png"/>
           <p:cNvPicPr>
             <a:picLocks noChangeAspect="1"/>
           </p:cNvPicPr>
@@ -11117,8 +11462,8 @@
         </p:blipFill>
         <p:spPr>
           <a:xfrm>
-            <a:off x="987552" y="3145536"/>
-            <a:ext cx="237744" cy="237744"/>
+            <a:off x="6523695" y="2655783"/>
+            <a:ext cx="266273" cy="266273"/>
           </a:xfrm>
           <a:prstGeom prst="rect">
             <a:avLst/>
@@ -11127,14 +11472,14 @@
       </p:pic>
       <p:sp>
         <p:nvSpPr>
-          <p:cNvPr id="11" name="TextBox 10"/>
+          <p:cNvPr id="13" name="TextBox 12"/>
           <p:cNvSpPr txBox="1"/>
           <p:nvPr/>
         </p:nvSpPr>
         <p:spPr>
           <a:xfrm>
-            <a:off x="1353312" y="2999232"/>
-            <a:ext cx="5029200" cy="530352"/>
+            <a:off x="7040880" y="2395728"/>
+            <a:ext cx="4206240" cy="786384"/>
           </a:xfrm>
           <a:prstGeom prst="rect">
             <a:avLst/>
@@ -11159,7 +11504,7 @@
               </a:spcAft>
             </a:pPr>
             <a:r>
-              <a:rPr sz="1200" b="0">
+              <a:rPr sz="1150" b="0">
                 <a:solidFill>
                   <a:srgbClr val="1A1A1A"/>
                 </a:solidFill>
@@ -11172,18 +11517,18 @@
       </p:sp>
       <p:sp>
         <p:nvSpPr>
-          <p:cNvPr id="12" name="Rounded Rectangle 11"/>
+          <p:cNvPr id="14" name="Rounded Rectangle 13"/>
           <p:cNvSpPr/>
           <p:nvPr/>
         </p:nvSpPr>
         <p:spPr>
           <a:xfrm>
-            <a:off x="841248" y="3602736"/>
-            <a:ext cx="5715000" cy="530352"/>
+            <a:off x="841248" y="3328416"/>
+            <a:ext cx="5138928" cy="786384"/>
           </a:xfrm>
           <a:prstGeom prst="roundRect">
             <a:avLst>
-              <a:gd name="adj" fmla="val 6000"/>
+              <a:gd name="adj" fmla="val 7000"/>
             </a:avLst>
           </a:prstGeom>
           <a:solidFill>
@@ -11218,9 +11563,55 @@
           </a:p>
         </p:txBody>
       </p:sp>
+      <p:sp>
+        <p:nvSpPr>
+          <p:cNvPr id="15" name="Rounded Rectangle 14"/>
+          <p:cNvSpPr/>
+          <p:nvPr/>
+        </p:nvSpPr>
+        <p:spPr>
+          <a:xfrm>
+            <a:off x="987552" y="3465576"/>
+            <a:ext cx="512064" cy="512064"/>
+          </a:xfrm>
+          <a:prstGeom prst="roundRect">
+            <a:avLst>
+              <a:gd name="adj" fmla="val 26000"/>
+            </a:avLst>
+          </a:prstGeom>
+          <a:solidFill>
+            <a:srgbClr val="EE0000"/>
+          </a:solidFill>
+          <a:ln>
+            <a:noFill/>
+          </a:ln>
+          <a:effectLst/>
+        </p:spPr>
+        <p:style>
+          <a:lnRef idx="1">
+            <a:schemeClr val="accent1"/>
+          </a:lnRef>
+          <a:fillRef idx="3">
+            <a:schemeClr val="accent1"/>
+          </a:fillRef>
+          <a:effectRef idx="2">
+            <a:schemeClr val="accent1"/>
+          </a:effectRef>
+          <a:fontRef idx="minor">
+            <a:schemeClr val="lt1"/>
+          </a:fontRef>
+        </p:style>
+        <p:txBody>
+          <a:bodyPr rtlCol="0" anchor="ctr"/>
+          <a:lstStyle/>
+          <a:p>
+            <a:pPr algn="ctr"/>
+          </a:p>
+        </p:txBody>
+      </p:sp>
       <p:pic>
         <p:nvPicPr>
-          <p:cNvPr id="13" name="Picture 12" descr="check_steel.png"/>
+          <p:cNvPr id="16" name="Picture 15" descr="check_white.png"/>
           <p:cNvPicPr>
             <a:picLocks noChangeAspect="1"/>
           </p:cNvPicPr>
@@ -11234,8 +11625,8 @@
         </p:blipFill>
         <p:spPr>
           <a:xfrm>
-            <a:off x="987552" y="3749040"/>
-            <a:ext cx="237744" cy="237744"/>
+            <a:off x="1110447" y="3588471"/>
+            <a:ext cx="266273" cy="266273"/>
           </a:xfrm>
           <a:prstGeom prst="rect">
             <a:avLst/>
@@ -11244,14 +11635,14 @@
       </p:pic>
       <p:sp>
         <p:nvSpPr>
-          <p:cNvPr id="14" name="TextBox 13"/>
+          <p:cNvPr id="17" name="TextBox 16"/>
           <p:cNvSpPr txBox="1"/>
           <p:nvPr/>
         </p:nvSpPr>
         <p:spPr>
           <a:xfrm>
-            <a:off x="1353312" y="3602736"/>
-            <a:ext cx="5029200" cy="530352"/>
+            <a:off x="1627632" y="3328416"/>
+            <a:ext cx="4206240" cy="786384"/>
           </a:xfrm>
           <a:prstGeom prst="rect">
             <a:avLst/>
@@ -11276,7 +11667,7 @@
               </a:spcAft>
             </a:pPr>
             <a:r>
-              <a:rPr sz="1200" b="0">
+              <a:rPr sz="1150" b="0">
                 <a:solidFill>
                   <a:srgbClr val="1A1A1A"/>
                 </a:solidFill>
@@ -11289,18 +11680,18 @@
       </p:sp>
       <p:sp>
         <p:nvSpPr>
-          <p:cNvPr id="15" name="Rounded Rectangle 14"/>
+          <p:cNvPr id="18" name="Rounded Rectangle 17"/>
           <p:cNvSpPr/>
           <p:nvPr/>
         </p:nvSpPr>
         <p:spPr>
           <a:xfrm>
-            <a:off x="841248" y="4206240"/>
-            <a:ext cx="5715000" cy="530352"/>
+            <a:off x="6254496" y="3328416"/>
+            <a:ext cx="5138928" cy="786384"/>
           </a:xfrm>
           <a:prstGeom prst="roundRect">
             <a:avLst>
-              <a:gd name="adj" fmla="val 6000"/>
+              <a:gd name="adj" fmla="val 7000"/>
             </a:avLst>
           </a:prstGeom>
           <a:solidFill>
@@ -11335,9 +11726,55 @@
           </a:p>
         </p:txBody>
       </p:sp>
+      <p:sp>
+        <p:nvSpPr>
+          <p:cNvPr id="19" name="Rounded Rectangle 18"/>
+          <p:cNvSpPr/>
+          <p:nvPr/>
+        </p:nvSpPr>
+        <p:spPr>
+          <a:xfrm>
+            <a:off x="6400800" y="3465576"/>
+            <a:ext cx="512064" cy="512064"/>
+          </a:xfrm>
+          <a:prstGeom prst="roundRect">
+            <a:avLst>
+              <a:gd name="adj" fmla="val 26000"/>
+            </a:avLst>
+          </a:prstGeom>
+          <a:solidFill>
+            <a:srgbClr val="EE0000"/>
+          </a:solidFill>
+          <a:ln>
+            <a:noFill/>
+          </a:ln>
+          <a:effectLst/>
+        </p:spPr>
+        <p:style>
+          <a:lnRef idx="1">
+            <a:schemeClr val="accent1"/>
+          </a:lnRef>
+          <a:fillRef idx="3">
+            <a:schemeClr val="accent1"/>
+          </a:fillRef>
+          <a:effectRef idx="2">
+            <a:schemeClr val="accent1"/>
+          </a:effectRef>
+          <a:fontRef idx="minor">
+            <a:schemeClr val="lt1"/>
+          </a:fontRef>
+        </p:style>
+        <p:txBody>
+          <a:bodyPr rtlCol="0" anchor="ctr"/>
+          <a:lstStyle/>
+          <a:p>
+            <a:pPr algn="ctr"/>
+          </a:p>
+        </p:txBody>
+      </p:sp>
       <p:pic>
         <p:nvPicPr>
-          <p:cNvPr id="16" name="Picture 15" descr="check_steel.png"/>
+          <p:cNvPr id="20" name="Picture 19" descr="check_white.png"/>
           <p:cNvPicPr>
             <a:picLocks noChangeAspect="1"/>
           </p:cNvPicPr>
@@ -11351,8 +11788,8 @@
         </p:blipFill>
         <p:spPr>
           <a:xfrm>
-            <a:off x="987552" y="4352544"/>
-            <a:ext cx="237744" cy="237744"/>
+            <a:off x="6523695" y="3588471"/>
+            <a:ext cx="266273" cy="266273"/>
           </a:xfrm>
           <a:prstGeom prst="rect">
             <a:avLst/>
@@ -11361,14 +11798,14 @@
       </p:pic>
       <p:sp>
         <p:nvSpPr>
-          <p:cNvPr id="17" name="TextBox 16"/>
+          <p:cNvPr id="21" name="TextBox 20"/>
           <p:cNvSpPr txBox="1"/>
           <p:nvPr/>
         </p:nvSpPr>
         <p:spPr>
           <a:xfrm>
-            <a:off x="1353312" y="4206240"/>
-            <a:ext cx="5029200" cy="530352"/>
+            <a:off x="7040880" y="3328416"/>
+            <a:ext cx="4206240" cy="786384"/>
           </a:xfrm>
           <a:prstGeom prst="rect">
             <a:avLst/>
@@ -11393,7 +11830,7 @@
               </a:spcAft>
             </a:pPr>
             <a:r>
-              <a:rPr sz="1200" b="0">
+              <a:rPr sz="1150" b="0">
                 <a:solidFill>
                   <a:srgbClr val="1A1A1A"/>
                 </a:solidFill>
@@ -11406,18 +11843,18 @@
       </p:sp>
       <p:sp>
         <p:nvSpPr>
-          <p:cNvPr id="18" name="Rounded Rectangle 17"/>
+          <p:cNvPr id="22" name="Rounded Rectangle 21"/>
           <p:cNvSpPr/>
           <p:nvPr/>
         </p:nvSpPr>
         <p:spPr>
           <a:xfrm>
-            <a:off x="841248" y="4809744"/>
-            <a:ext cx="5715000" cy="530352"/>
+            <a:off x="841248" y="4261104"/>
+            <a:ext cx="5138928" cy="786384"/>
           </a:xfrm>
           <a:prstGeom prst="roundRect">
             <a:avLst>
-              <a:gd name="adj" fmla="val 6000"/>
+              <a:gd name="adj" fmla="val 7000"/>
             </a:avLst>
           </a:prstGeom>
           <a:solidFill>
@@ -11452,9 +11889,55 @@
           </a:p>
         </p:txBody>
       </p:sp>
+      <p:sp>
+        <p:nvSpPr>
+          <p:cNvPr id="23" name="Rounded Rectangle 22"/>
+          <p:cNvSpPr/>
+          <p:nvPr/>
+        </p:nvSpPr>
+        <p:spPr>
+          <a:xfrm>
+            <a:off x="987552" y="4398264"/>
+            <a:ext cx="512064" cy="512064"/>
+          </a:xfrm>
+          <a:prstGeom prst="roundRect">
+            <a:avLst>
+              <a:gd name="adj" fmla="val 26000"/>
+            </a:avLst>
+          </a:prstGeom>
+          <a:solidFill>
+            <a:srgbClr val="EE0000"/>
+          </a:solidFill>
+          <a:ln>
+            <a:noFill/>
+          </a:ln>
+          <a:effectLst/>
+        </p:spPr>
+        <p:style>
+          <a:lnRef idx="1">
+            <a:schemeClr val="accent1"/>
+          </a:lnRef>
+          <a:fillRef idx="3">
+            <a:schemeClr val="accent1"/>
+          </a:fillRef>
+          <a:effectRef idx="2">
+            <a:schemeClr val="accent1"/>
+          </a:effectRef>
+          <a:fontRef idx="minor">
+            <a:schemeClr val="lt1"/>
+          </a:fontRef>
+        </p:style>
+        <p:txBody>
+          <a:bodyPr rtlCol="0" anchor="ctr"/>
+          <a:lstStyle/>
+          <a:p>
+            <a:pPr algn="ctr"/>
+          </a:p>
+        </p:txBody>
+      </p:sp>
       <p:pic>
         <p:nvPicPr>
-          <p:cNvPr id="19" name="Picture 18" descr="check_steel.png"/>
+          <p:cNvPr id="24" name="Picture 23" descr="check_white.png"/>
           <p:cNvPicPr>
             <a:picLocks noChangeAspect="1"/>
           </p:cNvPicPr>
@@ -11468,8 +11951,8 @@
         </p:blipFill>
         <p:spPr>
           <a:xfrm>
-            <a:off x="987552" y="4956048"/>
-            <a:ext cx="237744" cy="237744"/>
+            <a:off x="1110447" y="4521159"/>
+            <a:ext cx="266273" cy="266273"/>
           </a:xfrm>
           <a:prstGeom prst="rect">
             <a:avLst/>
@@ -11478,14 +11961,14 @@
       </p:pic>
       <p:sp>
         <p:nvSpPr>
-          <p:cNvPr id="20" name="TextBox 19"/>
+          <p:cNvPr id="25" name="TextBox 24"/>
           <p:cNvSpPr txBox="1"/>
           <p:nvPr/>
         </p:nvSpPr>
         <p:spPr>
           <a:xfrm>
-            <a:off x="1353312" y="4809744"/>
-            <a:ext cx="5029200" cy="530352"/>
+            <a:off x="1627632" y="4261104"/>
+            <a:ext cx="4206240" cy="786384"/>
           </a:xfrm>
           <a:prstGeom prst="rect">
             <a:avLst/>
@@ -11510,221 +11993,13 @@
               </a:spcAft>
             </a:pPr>
             <a:r>
-              <a:rPr sz="1200" b="0">
+              <a:rPr sz="1150" b="0">
                 <a:solidFill>
                   <a:srgbClr val="1A1A1A"/>
                 </a:solidFill>
                 <a:latin typeface="Red Hat Text"/>
               </a:rPr>
               <a:t>Inspect how the platform provisioned YOU</a:t>
-            </a:r>
-          </a:p>
-        </p:txBody>
-      </p:sp>
-      <p:sp>
-        <p:nvSpPr>
-          <p:cNvPr id="21" name="Rounded Rectangle 20"/>
-          <p:cNvSpPr/>
-          <p:nvPr/>
-        </p:nvSpPr>
-        <p:spPr>
-          <a:xfrm>
-            <a:off x="6812280" y="2395728"/>
-            <a:ext cx="4538167" cy="2944368"/>
-          </a:xfrm>
-          <a:prstGeom prst="roundRect">
-            <a:avLst>
-              <a:gd name="adj" fmla="val 4000"/>
-            </a:avLst>
-          </a:prstGeom>
-          <a:solidFill>
-            <a:srgbClr val="FFFFFF"/>
-          </a:solidFill>
-          <a:ln w="15240">
-            <a:solidFill>
-              <a:srgbClr val="DDE1E6"/>
-            </a:solidFill>
-          </a:ln>
-          <a:effectLst/>
-        </p:spPr>
-        <p:style>
-          <a:lnRef idx="1">
-            <a:schemeClr val="accent1"/>
-          </a:lnRef>
-          <a:fillRef idx="3">
-            <a:schemeClr val="accent1"/>
-          </a:fillRef>
-          <a:effectRef idx="2">
-            <a:schemeClr val="accent1"/>
-          </a:effectRef>
-          <a:fontRef idx="minor">
-            <a:schemeClr val="lt1"/>
-          </a:fontRef>
-        </p:style>
-        <p:txBody>
-          <a:bodyPr rtlCol="0" anchor="ctr"/>
-          <a:lstStyle/>
-          <a:p>
-            <a:pPr algn="ctr"/>
-          </a:p>
-        </p:txBody>
-      </p:sp>
-      <p:sp>
-        <p:nvSpPr>
-          <p:cNvPr id="22" name="Rounded Rectangle 21"/>
-          <p:cNvSpPr/>
-          <p:nvPr/>
-        </p:nvSpPr>
-        <p:spPr>
-          <a:xfrm>
-            <a:off x="7013448" y="2596896"/>
-            <a:ext cx="1298448" cy="310896"/>
-          </a:xfrm>
-          <a:prstGeom prst="roundRect">
-            <a:avLst>
-              <a:gd name="adj" fmla="val 50000"/>
-            </a:avLst>
-          </a:prstGeom>
-          <a:solidFill>
-            <a:srgbClr val="FCECEC"/>
-          </a:solidFill>
-          <a:ln>
-            <a:noFill/>
-          </a:ln>
-          <a:effectLst/>
-        </p:spPr>
-        <p:style>
-          <a:lnRef idx="1">
-            <a:schemeClr val="accent1"/>
-          </a:lnRef>
-          <a:fillRef idx="3">
-            <a:schemeClr val="accent1"/>
-          </a:fillRef>
-          <a:effectRef idx="2">
-            <a:schemeClr val="accent1"/>
-          </a:effectRef>
-          <a:fontRef idx="minor">
-            <a:schemeClr val="lt1"/>
-          </a:fontRef>
-        </p:style>
-        <p:txBody>
-          <a:bodyPr rtlCol="0" anchor="ctr"/>
-          <a:lstStyle/>
-          <a:p>
-            <a:pPr algn="ctr"/>
-          </a:p>
-        </p:txBody>
-      </p:sp>
-      <p:sp>
-        <p:nvSpPr>
-          <p:cNvPr id="23" name="TextBox 22"/>
-          <p:cNvSpPr txBox="1"/>
-          <p:nvPr/>
-        </p:nvSpPr>
-        <p:spPr>
-          <a:xfrm>
-            <a:off x="7013448" y="2596896"/>
-            <a:ext cx="1298448" cy="310896"/>
-          </a:xfrm>
-          <a:prstGeom prst="rect">
-            <a:avLst/>
-          </a:prstGeom>
-          <a:noFill/>
-        </p:spPr>
-        <p:txBody>
-          <a:bodyPr wrap="none" anchor="ctr" lIns="0" rIns="0" tIns="0" bIns="0">
-            <a:spAutoFit/>
-          </a:bodyPr>
-          <a:lstStyle/>
-          <a:p>
-            <a:pPr algn="ctr">
-              <a:lnSpc>
-                <a:spcPct val="106000"/>
-              </a:lnSpc>
-              <a:spcBef>
-                <a:spcPts val="0"/>
-              </a:spcBef>
-              <a:spcAft>
-                <a:spcPts val="0"/>
-              </a:spcAft>
-            </a:pPr>
-            <a:r>
-              <a:rPr sz="850" b="1">
-                <a:solidFill>
-                  <a:srgbClr val="B80000"/>
-                </a:solidFill>
-                <a:latin typeface="Red Hat Display"/>
-              </a:rPr>
-              <a:t>MEDIA PASS</a:t>
-            </a:r>
-          </a:p>
-        </p:txBody>
-      </p:sp>
-      <p:pic>
-        <p:nvPicPr>
-          <p:cNvPr id="24" name="Picture 23" descr="eye_slate.png"/>
-          <p:cNvPicPr>
-            <a:picLocks noChangeAspect="1"/>
-          </p:cNvPicPr>
-          <p:nvPr/>
-        </p:nvPicPr>
-        <p:blipFill>
-          <a:blip r:embed="rId4"/>
-          <a:stretch>
-            <a:fillRect/>
-          </a:stretch>
-        </p:blipFill>
-        <p:spPr>
-          <a:xfrm>
-            <a:off x="8843619" y="3108960"/>
-            <a:ext cx="475488" cy="475488"/>
-          </a:xfrm>
-          <a:prstGeom prst="rect">
-            <a:avLst/>
-          </a:prstGeom>
-        </p:spPr>
-      </p:pic>
-      <p:sp>
-        <p:nvSpPr>
-          <p:cNvPr id="25" name="TextBox 24"/>
-          <p:cNvSpPr txBox="1"/>
-          <p:nvPr/>
-        </p:nvSpPr>
-        <p:spPr>
-          <a:xfrm>
-            <a:off x="7050024" y="3721608"/>
-            <a:ext cx="4062679" cy="1481328"/>
-          </a:xfrm>
-          <a:prstGeom prst="rect">
-            <a:avLst/>
-          </a:prstGeom>
-          <a:noFill/>
-        </p:spPr>
-        <p:txBody>
-          <a:bodyPr wrap="square" anchor="t" lIns="0" rIns="0" tIns="0" bIns="0">
-            <a:spAutoFit/>
-          </a:bodyPr>
-          <a:lstStyle/>
-          <a:p>
-            <a:pPr algn="l">
-              <a:lnSpc>
-                <a:spcPct val="120000"/>
-              </a:lnSpc>
-              <a:spcBef>
-                <a:spcPts val="0"/>
-              </a:spcBef>
-              <a:spcAft>
-                <a:spcPts val="0"/>
-              </a:spcAft>
-            </a:pPr>
-            <a:r>
-              <a:rPr sz="950" b="0">
-                <a:solidFill>
-                  <a:srgbClr val="8A9099"/>
-                </a:solidFill>
-                <a:latin typeface="Red Hat Text"/>
-              </a:rPr>
-              <a:t>Numbered arc strip: reject-root → fix → grant/audit → custom-role → quota exceed/fix → the reveal.</a:t>
             </a:r>
           </a:p>
         </p:txBody>
@@ -12032,11 +12307,11 @@
         <p:spPr>
           <a:xfrm>
             <a:off x="841248" y="2395728"/>
-            <a:ext cx="5715000" cy="530352"/>
+            <a:ext cx="5138928" cy="786384"/>
           </a:xfrm>
           <a:prstGeom prst="roundRect">
             <a:avLst>
-              <a:gd name="adj" fmla="val 6000"/>
+              <a:gd name="adj" fmla="val 7000"/>
             </a:avLst>
           </a:prstGeom>
           <a:solidFill>
@@ -12071,9 +12346,55 @@
           </a:p>
         </p:txBody>
       </p:sp>
+      <p:sp>
+        <p:nvSpPr>
+          <p:cNvPr id="7" name="Rounded Rectangle 6"/>
+          <p:cNvSpPr/>
+          <p:nvPr/>
+        </p:nvSpPr>
+        <p:spPr>
+          <a:xfrm>
+            <a:off x="987552" y="2532888"/>
+            <a:ext cx="512064" cy="512064"/>
+          </a:xfrm>
+          <a:prstGeom prst="roundRect">
+            <a:avLst>
+              <a:gd name="adj" fmla="val 26000"/>
+            </a:avLst>
+          </a:prstGeom>
+          <a:solidFill>
+            <a:srgbClr val="EE0000"/>
+          </a:solidFill>
+          <a:ln>
+            <a:noFill/>
+          </a:ln>
+          <a:effectLst/>
+        </p:spPr>
+        <p:style>
+          <a:lnRef idx="1">
+            <a:schemeClr val="accent1"/>
+          </a:lnRef>
+          <a:fillRef idx="3">
+            <a:schemeClr val="accent1"/>
+          </a:fillRef>
+          <a:effectRef idx="2">
+            <a:schemeClr val="accent1"/>
+          </a:effectRef>
+          <a:fontRef idx="minor">
+            <a:schemeClr val="lt1"/>
+          </a:fontRef>
+        </p:style>
+        <p:txBody>
+          <a:bodyPr rtlCol="0" anchor="ctr"/>
+          <a:lstStyle/>
+          <a:p>
+            <a:pPr algn="ctr"/>
+          </a:p>
+        </p:txBody>
+      </p:sp>
       <p:pic>
         <p:nvPicPr>
-          <p:cNvPr id="7" name="Picture 6" descr="check_steel.png"/>
+          <p:cNvPr id="8" name="Picture 7" descr="check_white.png"/>
           <p:cNvPicPr>
             <a:picLocks noChangeAspect="1"/>
           </p:cNvPicPr>
@@ -12087,8 +12408,8 @@
         </p:blipFill>
         <p:spPr>
           <a:xfrm>
-            <a:off x="987552" y="2542032"/>
-            <a:ext cx="237744" cy="237744"/>
+            <a:off x="1110447" y="2655783"/>
+            <a:ext cx="266273" cy="266273"/>
           </a:xfrm>
           <a:prstGeom prst="rect">
             <a:avLst/>
@@ -12097,14 +12418,14 @@
       </p:pic>
       <p:sp>
         <p:nvSpPr>
-          <p:cNvPr id="8" name="TextBox 7"/>
+          <p:cNvPr id="9" name="TextBox 8"/>
           <p:cNvSpPr txBox="1"/>
           <p:nvPr/>
         </p:nvSpPr>
         <p:spPr>
           <a:xfrm>
-            <a:off x="1353312" y="2395728"/>
-            <a:ext cx="5029200" cy="530352"/>
+            <a:off x="1627632" y="2395728"/>
+            <a:ext cx="4206240" cy="786384"/>
           </a:xfrm>
           <a:prstGeom prst="rect">
             <a:avLst/>
@@ -12129,7 +12450,7 @@
               </a:spcAft>
             </a:pPr>
             <a:r>
-              <a:rPr sz="1200" b="0">
+              <a:rPr sz="1150" b="0">
                 <a:solidFill>
                   <a:srgbClr val="1A1A1A"/>
                 </a:solidFill>
@@ -12142,18 +12463,18 @@
       </p:sp>
       <p:sp>
         <p:nvSpPr>
-          <p:cNvPr id="9" name="Rounded Rectangle 8"/>
+          <p:cNvPr id="10" name="Rounded Rectangle 9"/>
           <p:cNvSpPr/>
           <p:nvPr/>
         </p:nvSpPr>
         <p:spPr>
           <a:xfrm>
-            <a:off x="841248" y="2999232"/>
-            <a:ext cx="5715000" cy="530352"/>
+            <a:off x="6254496" y="2395728"/>
+            <a:ext cx="5138928" cy="786384"/>
           </a:xfrm>
           <a:prstGeom prst="roundRect">
             <a:avLst>
-              <a:gd name="adj" fmla="val 6000"/>
+              <a:gd name="adj" fmla="val 7000"/>
             </a:avLst>
           </a:prstGeom>
           <a:solidFill>
@@ -12188,9 +12509,55 @@
           </a:p>
         </p:txBody>
       </p:sp>
+      <p:sp>
+        <p:nvSpPr>
+          <p:cNvPr id="11" name="Rounded Rectangle 10"/>
+          <p:cNvSpPr/>
+          <p:nvPr/>
+        </p:nvSpPr>
+        <p:spPr>
+          <a:xfrm>
+            <a:off x="6400800" y="2532888"/>
+            <a:ext cx="512064" cy="512064"/>
+          </a:xfrm>
+          <a:prstGeom prst="roundRect">
+            <a:avLst>
+              <a:gd name="adj" fmla="val 26000"/>
+            </a:avLst>
+          </a:prstGeom>
+          <a:solidFill>
+            <a:srgbClr val="EE0000"/>
+          </a:solidFill>
+          <a:ln>
+            <a:noFill/>
+          </a:ln>
+          <a:effectLst/>
+        </p:spPr>
+        <p:style>
+          <a:lnRef idx="1">
+            <a:schemeClr val="accent1"/>
+          </a:lnRef>
+          <a:fillRef idx="3">
+            <a:schemeClr val="accent1"/>
+          </a:fillRef>
+          <a:effectRef idx="2">
+            <a:schemeClr val="accent1"/>
+          </a:effectRef>
+          <a:fontRef idx="minor">
+            <a:schemeClr val="lt1"/>
+          </a:fontRef>
+        </p:style>
+        <p:txBody>
+          <a:bodyPr rtlCol="0" anchor="ctr"/>
+          <a:lstStyle/>
+          <a:p>
+            <a:pPr algn="ctr"/>
+          </a:p>
+        </p:txBody>
+      </p:sp>
       <p:pic>
         <p:nvPicPr>
-          <p:cNvPr id="10" name="Picture 9" descr="check_steel.png"/>
+          <p:cNvPr id="12" name="Picture 11" descr="check_white.png"/>
           <p:cNvPicPr>
             <a:picLocks noChangeAspect="1"/>
           </p:cNvPicPr>
@@ -12204,8 +12571,8 @@
         </p:blipFill>
         <p:spPr>
           <a:xfrm>
-            <a:off x="987552" y="3145536"/>
-            <a:ext cx="237744" cy="237744"/>
+            <a:off x="6523695" y="2655783"/>
+            <a:ext cx="266273" cy="266273"/>
           </a:xfrm>
           <a:prstGeom prst="rect">
             <a:avLst/>
@@ -12214,14 +12581,14 @@
       </p:pic>
       <p:sp>
         <p:nvSpPr>
-          <p:cNvPr id="11" name="TextBox 10"/>
+          <p:cNvPr id="13" name="TextBox 12"/>
           <p:cNvSpPr txBox="1"/>
           <p:nvPr/>
         </p:nvSpPr>
         <p:spPr>
           <a:xfrm>
-            <a:off x="1353312" y="2999232"/>
-            <a:ext cx="5029200" cy="530352"/>
+            <a:off x="7040880" y="2395728"/>
+            <a:ext cx="4206240" cy="786384"/>
           </a:xfrm>
           <a:prstGeom prst="rect">
             <a:avLst/>
@@ -12246,7 +12613,7 @@
               </a:spcAft>
             </a:pPr>
             <a:r>
-              <a:rPr sz="1200" b="0">
+              <a:rPr sz="1150" b="0">
                 <a:solidFill>
                   <a:srgbClr val="1A1A1A"/>
                 </a:solidFill>
@@ -12259,18 +12626,18 @@
       </p:sp>
       <p:sp>
         <p:nvSpPr>
-          <p:cNvPr id="12" name="Rounded Rectangle 11"/>
+          <p:cNvPr id="14" name="Rounded Rectangle 13"/>
           <p:cNvSpPr/>
           <p:nvPr/>
         </p:nvSpPr>
         <p:spPr>
           <a:xfrm>
-            <a:off x="841248" y="3602736"/>
-            <a:ext cx="5715000" cy="530352"/>
+            <a:off x="841248" y="3328416"/>
+            <a:ext cx="5138928" cy="786384"/>
           </a:xfrm>
           <a:prstGeom prst="roundRect">
             <a:avLst>
-              <a:gd name="adj" fmla="val 6000"/>
+              <a:gd name="adj" fmla="val 7000"/>
             </a:avLst>
           </a:prstGeom>
           <a:solidFill>
@@ -12305,9 +12672,55 @@
           </a:p>
         </p:txBody>
       </p:sp>
+      <p:sp>
+        <p:nvSpPr>
+          <p:cNvPr id="15" name="Rounded Rectangle 14"/>
+          <p:cNvSpPr/>
+          <p:nvPr/>
+        </p:nvSpPr>
+        <p:spPr>
+          <a:xfrm>
+            <a:off x="987552" y="3465576"/>
+            <a:ext cx="512064" cy="512064"/>
+          </a:xfrm>
+          <a:prstGeom prst="roundRect">
+            <a:avLst>
+              <a:gd name="adj" fmla="val 26000"/>
+            </a:avLst>
+          </a:prstGeom>
+          <a:solidFill>
+            <a:srgbClr val="EE0000"/>
+          </a:solidFill>
+          <a:ln>
+            <a:noFill/>
+          </a:ln>
+          <a:effectLst/>
+        </p:spPr>
+        <p:style>
+          <a:lnRef idx="1">
+            <a:schemeClr val="accent1"/>
+          </a:lnRef>
+          <a:fillRef idx="3">
+            <a:schemeClr val="accent1"/>
+          </a:fillRef>
+          <a:effectRef idx="2">
+            <a:schemeClr val="accent1"/>
+          </a:effectRef>
+          <a:fontRef idx="minor">
+            <a:schemeClr val="lt1"/>
+          </a:fontRef>
+        </p:style>
+        <p:txBody>
+          <a:bodyPr rtlCol="0" anchor="ctr"/>
+          <a:lstStyle/>
+          <a:p>
+            <a:pPr algn="ctr"/>
+          </a:p>
+        </p:txBody>
+      </p:sp>
       <p:pic>
         <p:nvPicPr>
-          <p:cNvPr id="13" name="Picture 12" descr="check_steel.png"/>
+          <p:cNvPr id="16" name="Picture 15" descr="check_white.png"/>
           <p:cNvPicPr>
             <a:picLocks noChangeAspect="1"/>
           </p:cNvPicPr>
@@ -12321,8 +12734,8 @@
         </p:blipFill>
         <p:spPr>
           <a:xfrm>
-            <a:off x="987552" y="3749040"/>
-            <a:ext cx="237744" cy="237744"/>
+            <a:off x="1110447" y="3588471"/>
+            <a:ext cx="266273" cy="266273"/>
           </a:xfrm>
           <a:prstGeom prst="rect">
             <a:avLst/>
@@ -12331,14 +12744,14 @@
       </p:pic>
       <p:sp>
         <p:nvSpPr>
-          <p:cNvPr id="14" name="TextBox 13"/>
+          <p:cNvPr id="17" name="TextBox 16"/>
           <p:cNvSpPr txBox="1"/>
           <p:nvPr/>
         </p:nvSpPr>
         <p:spPr>
           <a:xfrm>
-            <a:off x="1353312" y="3602736"/>
-            <a:ext cx="5029200" cy="530352"/>
+            <a:off x="1627632" y="3328416"/>
+            <a:ext cx="4206240" cy="786384"/>
           </a:xfrm>
           <a:prstGeom prst="rect">
             <a:avLst/>
@@ -12363,7 +12776,7 @@
               </a:spcAft>
             </a:pPr>
             <a:r>
-              <a:rPr sz="1200" b="0">
+              <a:rPr sz="1150" b="0">
                 <a:solidFill>
                   <a:srgbClr val="1A1A1A"/>
                 </a:solidFill>
@@ -12376,18 +12789,18 @@
       </p:sp>
       <p:sp>
         <p:nvSpPr>
-          <p:cNvPr id="15" name="Rounded Rectangle 14"/>
+          <p:cNvPr id="18" name="Rounded Rectangle 17"/>
           <p:cNvSpPr/>
           <p:nvPr/>
         </p:nvSpPr>
         <p:spPr>
           <a:xfrm>
-            <a:off x="841248" y="4206240"/>
-            <a:ext cx="5715000" cy="530352"/>
+            <a:off x="6254496" y="3328416"/>
+            <a:ext cx="5138928" cy="786384"/>
           </a:xfrm>
           <a:prstGeom prst="roundRect">
             <a:avLst>
-              <a:gd name="adj" fmla="val 6000"/>
+              <a:gd name="adj" fmla="val 7000"/>
             </a:avLst>
           </a:prstGeom>
           <a:solidFill>
@@ -12422,9 +12835,55 @@
           </a:p>
         </p:txBody>
       </p:sp>
+      <p:sp>
+        <p:nvSpPr>
+          <p:cNvPr id="19" name="Rounded Rectangle 18"/>
+          <p:cNvSpPr/>
+          <p:nvPr/>
+        </p:nvSpPr>
+        <p:spPr>
+          <a:xfrm>
+            <a:off x="6400800" y="3465576"/>
+            <a:ext cx="512064" cy="512064"/>
+          </a:xfrm>
+          <a:prstGeom prst="roundRect">
+            <a:avLst>
+              <a:gd name="adj" fmla="val 26000"/>
+            </a:avLst>
+          </a:prstGeom>
+          <a:solidFill>
+            <a:srgbClr val="EE0000"/>
+          </a:solidFill>
+          <a:ln>
+            <a:noFill/>
+          </a:ln>
+          <a:effectLst/>
+        </p:spPr>
+        <p:style>
+          <a:lnRef idx="1">
+            <a:schemeClr val="accent1"/>
+          </a:lnRef>
+          <a:fillRef idx="3">
+            <a:schemeClr val="accent1"/>
+          </a:fillRef>
+          <a:effectRef idx="2">
+            <a:schemeClr val="accent1"/>
+          </a:effectRef>
+          <a:fontRef idx="minor">
+            <a:schemeClr val="lt1"/>
+          </a:fontRef>
+        </p:style>
+        <p:txBody>
+          <a:bodyPr rtlCol="0" anchor="ctr"/>
+          <a:lstStyle/>
+          <a:p>
+            <a:pPr algn="ctr"/>
+          </a:p>
+        </p:txBody>
+      </p:sp>
       <p:pic>
         <p:nvPicPr>
-          <p:cNvPr id="16" name="Picture 15" descr="check_steel.png"/>
+          <p:cNvPr id="20" name="Picture 19" descr="check_white.png"/>
           <p:cNvPicPr>
             <a:picLocks noChangeAspect="1"/>
           </p:cNvPicPr>
@@ -12438,8 +12897,8 @@
         </p:blipFill>
         <p:spPr>
           <a:xfrm>
-            <a:off x="987552" y="4352544"/>
-            <a:ext cx="237744" cy="237744"/>
+            <a:off x="6523695" y="3588471"/>
+            <a:ext cx="266273" cy="266273"/>
           </a:xfrm>
           <a:prstGeom prst="rect">
             <a:avLst/>
@@ -12448,14 +12907,14 @@
       </p:pic>
       <p:sp>
         <p:nvSpPr>
-          <p:cNvPr id="17" name="TextBox 16"/>
+          <p:cNvPr id="21" name="TextBox 20"/>
           <p:cNvSpPr txBox="1"/>
           <p:nvPr/>
         </p:nvSpPr>
         <p:spPr>
           <a:xfrm>
-            <a:off x="1353312" y="4206240"/>
-            <a:ext cx="5029200" cy="530352"/>
+            <a:off x="7040880" y="3328416"/>
+            <a:ext cx="4206240" cy="786384"/>
           </a:xfrm>
           <a:prstGeom prst="rect">
             <a:avLst/>
@@ -12480,7 +12939,7 @@
               </a:spcAft>
             </a:pPr>
             <a:r>
-              <a:rPr sz="1200" b="0">
+              <a:rPr sz="1150" b="0">
                 <a:solidFill>
                   <a:srgbClr val="1A1A1A"/>
                 </a:solidFill>
@@ -12493,18 +12952,18 @@
       </p:sp>
       <p:sp>
         <p:nvSpPr>
-          <p:cNvPr id="18" name="Rounded Rectangle 17"/>
+          <p:cNvPr id="22" name="Rounded Rectangle 21"/>
           <p:cNvSpPr/>
           <p:nvPr/>
         </p:nvSpPr>
         <p:spPr>
           <a:xfrm>
-            <a:off x="841248" y="4809744"/>
-            <a:ext cx="5715000" cy="530352"/>
+            <a:off x="841248" y="4261104"/>
+            <a:ext cx="5138928" cy="786384"/>
           </a:xfrm>
           <a:prstGeom prst="roundRect">
             <a:avLst>
-              <a:gd name="adj" fmla="val 6000"/>
+              <a:gd name="adj" fmla="val 7000"/>
             </a:avLst>
           </a:prstGeom>
           <a:solidFill>
@@ -12539,9 +12998,55 @@
           </a:p>
         </p:txBody>
       </p:sp>
+      <p:sp>
+        <p:nvSpPr>
+          <p:cNvPr id="23" name="Rounded Rectangle 22"/>
+          <p:cNvSpPr/>
+          <p:nvPr/>
+        </p:nvSpPr>
+        <p:spPr>
+          <a:xfrm>
+            <a:off x="987552" y="4398264"/>
+            <a:ext cx="512064" cy="512064"/>
+          </a:xfrm>
+          <a:prstGeom prst="roundRect">
+            <a:avLst>
+              <a:gd name="adj" fmla="val 26000"/>
+            </a:avLst>
+          </a:prstGeom>
+          <a:solidFill>
+            <a:srgbClr val="EE0000"/>
+          </a:solidFill>
+          <a:ln>
+            <a:noFill/>
+          </a:ln>
+          <a:effectLst/>
+        </p:spPr>
+        <p:style>
+          <a:lnRef idx="1">
+            <a:schemeClr val="accent1"/>
+          </a:lnRef>
+          <a:fillRef idx="3">
+            <a:schemeClr val="accent1"/>
+          </a:fillRef>
+          <a:effectRef idx="2">
+            <a:schemeClr val="accent1"/>
+          </a:effectRef>
+          <a:fontRef idx="minor">
+            <a:schemeClr val="lt1"/>
+          </a:fontRef>
+        </p:style>
+        <p:txBody>
+          <a:bodyPr rtlCol="0" anchor="ctr"/>
+          <a:lstStyle/>
+          <a:p>
+            <a:pPr algn="ctr"/>
+          </a:p>
+        </p:txBody>
+      </p:sp>
       <p:pic>
         <p:nvPicPr>
-          <p:cNvPr id="19" name="Picture 18" descr="check_steel.png"/>
+          <p:cNvPr id="24" name="Picture 23" descr="check_white.png"/>
           <p:cNvPicPr>
             <a:picLocks noChangeAspect="1"/>
           </p:cNvPicPr>
@@ -12555,8 +13060,8 @@
         </p:blipFill>
         <p:spPr>
           <a:xfrm>
-            <a:off x="987552" y="4956048"/>
-            <a:ext cx="237744" cy="237744"/>
+            <a:off x="1110447" y="4521159"/>
+            <a:ext cx="266273" cy="266273"/>
           </a:xfrm>
           <a:prstGeom prst="rect">
             <a:avLst/>
@@ -12565,14 +13070,14 @@
       </p:pic>
       <p:sp>
         <p:nvSpPr>
-          <p:cNvPr id="20" name="TextBox 19"/>
+          <p:cNvPr id="25" name="TextBox 24"/>
           <p:cNvSpPr txBox="1"/>
           <p:nvPr/>
         </p:nvSpPr>
         <p:spPr>
           <a:xfrm>
-            <a:off x="1353312" y="4809744"/>
-            <a:ext cx="5029200" cy="530352"/>
+            <a:off x="1627632" y="4261104"/>
+            <a:ext cx="4206240" cy="786384"/>
           </a:xfrm>
           <a:prstGeom prst="rect">
             <a:avLst/>
@@ -12597,221 +13102,13 @@
               </a:spcAft>
             </a:pPr>
             <a:r>
-              <a:rPr sz="1200" b="0">
+              <a:rPr sz="1150" b="0">
                 <a:solidFill>
                   <a:srgbClr val="1A1A1A"/>
                 </a:solidFill>
                 <a:latin typeface="Red Hat Text"/>
               </a:rPr>
               <a:t>Don't buy cluster-per-team for density's sake</a:t>
-            </a:r>
-          </a:p>
-        </p:txBody>
-      </p:sp>
-      <p:sp>
-        <p:nvSpPr>
-          <p:cNvPr id="21" name="Rounded Rectangle 20"/>
-          <p:cNvSpPr/>
-          <p:nvPr/>
-        </p:nvSpPr>
-        <p:spPr>
-          <a:xfrm>
-            <a:off x="6812280" y="2395728"/>
-            <a:ext cx="4538167" cy="2944368"/>
-          </a:xfrm>
-          <a:prstGeom prst="roundRect">
-            <a:avLst>
-              <a:gd name="adj" fmla="val 4000"/>
-            </a:avLst>
-          </a:prstGeom>
-          <a:solidFill>
-            <a:srgbClr val="FFFFFF"/>
-          </a:solidFill>
-          <a:ln w="15240">
-            <a:solidFill>
-              <a:srgbClr val="DDE1E6"/>
-            </a:solidFill>
-          </a:ln>
-          <a:effectLst/>
-        </p:spPr>
-        <p:style>
-          <a:lnRef idx="1">
-            <a:schemeClr val="accent1"/>
-          </a:lnRef>
-          <a:fillRef idx="3">
-            <a:schemeClr val="accent1"/>
-          </a:fillRef>
-          <a:effectRef idx="2">
-            <a:schemeClr val="accent1"/>
-          </a:effectRef>
-          <a:fontRef idx="minor">
-            <a:schemeClr val="lt1"/>
-          </a:fontRef>
-        </p:style>
-        <p:txBody>
-          <a:bodyPr rtlCol="0" anchor="ctr"/>
-          <a:lstStyle/>
-          <a:p>
-            <a:pPr algn="ctr"/>
-          </a:p>
-        </p:txBody>
-      </p:sp>
-      <p:sp>
-        <p:nvSpPr>
-          <p:cNvPr id="22" name="Rounded Rectangle 21"/>
-          <p:cNvSpPr/>
-          <p:nvPr/>
-        </p:nvSpPr>
-        <p:spPr>
-          <a:xfrm>
-            <a:off x="7013448" y="2596896"/>
-            <a:ext cx="1298448" cy="310896"/>
-          </a:xfrm>
-          <a:prstGeom prst="roundRect">
-            <a:avLst>
-              <a:gd name="adj" fmla="val 50000"/>
-            </a:avLst>
-          </a:prstGeom>
-          <a:solidFill>
-            <a:srgbClr val="FCECEC"/>
-          </a:solidFill>
-          <a:ln>
-            <a:noFill/>
-          </a:ln>
-          <a:effectLst/>
-        </p:spPr>
-        <p:style>
-          <a:lnRef idx="1">
-            <a:schemeClr val="accent1"/>
-          </a:lnRef>
-          <a:fillRef idx="3">
-            <a:schemeClr val="accent1"/>
-          </a:fillRef>
-          <a:effectRef idx="2">
-            <a:schemeClr val="accent1"/>
-          </a:effectRef>
-          <a:fontRef idx="minor">
-            <a:schemeClr val="lt1"/>
-          </a:fontRef>
-        </p:style>
-        <p:txBody>
-          <a:bodyPr rtlCol="0" anchor="ctr"/>
-          <a:lstStyle/>
-          <a:p>
-            <a:pPr algn="ctr"/>
-          </a:p>
-        </p:txBody>
-      </p:sp>
-      <p:sp>
-        <p:nvSpPr>
-          <p:cNvPr id="23" name="TextBox 22"/>
-          <p:cNvSpPr txBox="1"/>
-          <p:nvPr/>
-        </p:nvSpPr>
-        <p:spPr>
-          <a:xfrm>
-            <a:off x="7013448" y="2596896"/>
-            <a:ext cx="1298448" cy="310896"/>
-          </a:xfrm>
-          <a:prstGeom prst="rect">
-            <a:avLst/>
-          </a:prstGeom>
-          <a:noFill/>
-        </p:spPr>
-        <p:txBody>
-          <a:bodyPr wrap="none" anchor="ctr" lIns="0" rIns="0" tIns="0" bIns="0">
-            <a:spAutoFit/>
-          </a:bodyPr>
-          <a:lstStyle/>
-          <a:p>
-            <a:pPr algn="ctr">
-              <a:lnSpc>
-                <a:spcPct val="106000"/>
-              </a:lnSpc>
-              <a:spcBef>
-                <a:spcPts val="0"/>
-              </a:spcBef>
-              <a:spcAft>
-                <a:spcPts val="0"/>
-              </a:spcAft>
-            </a:pPr>
-            <a:r>
-              <a:rPr sz="850" b="1">
-                <a:solidFill>
-                  <a:srgbClr val="B80000"/>
-                </a:solidFill>
-                <a:latin typeface="Red Hat Display"/>
-              </a:rPr>
-              <a:t>MEDIA PASS</a:t>
-            </a:r>
-          </a:p>
-        </p:txBody>
-      </p:sp>
-      <p:pic>
-        <p:nvPicPr>
-          <p:cNvPr id="24" name="Picture 23" descr="eye_slate.png"/>
-          <p:cNvPicPr>
-            <a:picLocks noChangeAspect="1"/>
-          </p:cNvPicPr>
-          <p:nvPr/>
-        </p:nvPicPr>
-        <p:blipFill>
-          <a:blip r:embed="rId4"/>
-          <a:stretch>
-            <a:fillRect/>
-          </a:stretch>
-        </p:blipFill>
-        <p:spPr>
-          <a:xfrm>
-            <a:off x="8843619" y="3108960"/>
-            <a:ext cx="475488" cy="475488"/>
-          </a:xfrm>
-          <a:prstGeom prst="rect">
-            <a:avLst/>
-          </a:prstGeom>
-        </p:spPr>
-      </p:pic>
-      <p:sp>
-        <p:nvSpPr>
-          <p:cNvPr id="25" name="TextBox 24"/>
-          <p:cNvSpPr txBox="1"/>
-          <p:nvPr/>
-        </p:nvSpPr>
-        <p:spPr>
-          <a:xfrm>
-            <a:off x="7050024" y="3721608"/>
-            <a:ext cx="4062679" cy="1481328"/>
-          </a:xfrm>
-          <a:prstGeom prst="rect">
-            <a:avLst/>
-          </a:prstGeom>
-          <a:noFill/>
-        </p:spPr>
-        <p:txBody>
-          <a:bodyPr wrap="square" anchor="t" lIns="0" rIns="0" tIns="0" bIns="0">
-            <a:spAutoFit/>
-          </a:bodyPr>
-          <a:lstStyle/>
-          <a:p>
-            <a:pPr algn="l">
-              <a:lnSpc>
-                <a:spcPct val="120000"/>
-              </a:lnSpc>
-              <a:spcBef>
-                <a:spcPts val="0"/>
-              </a:spcBef>
-              <a:spcAft>
-                <a:spcPts val="0"/>
-              </a:spcAft>
-            </a:pPr>
-            <a:r>
-              <a:rPr sz="950" b="0">
-                <a:solidFill>
-                  <a:srgbClr val="8A9099"/>
-                </a:solidFill>
-                <a:latin typeface="Red Hat Text"/>
-              </a:rPr>
-              <a:t>Two-column card "reach for it / a built-in (or namespace) is enough", footnote pointer to the Networking module for the NetworkPolicy half of tenancy.</a:t>
             </a:r>
           </a:p>
         </p:txBody>
